--- a/docs/presentation_slides.pptx
+++ b/docs/presentation_slides.pptx
@@ -508,25 +508,17 @@
           <a:lstStyle/>
           <a:p>
             <a:r>
-              <a:t>Good morning/afternoon, interview panel. I am excited to present this end-to-end Decision Intelligence project tailored for MR.DIY.</a:t>
-            </a:r>
-          </a:p>
-          <a:p/>
-          <a:p>
-            <a:r>
-              <a:t>MR.DIY operates a massive network of over 1,200 retail stores across Malaysia and the region. In retail, inventory allocation is inherently asymmetric: losing a customer sale on a high-velocity Household item or DIY hardware tool costs 8 to 15 times more than the carrying cost of holding an extra unit on the shelf.</a:t>
-            </a:r>
-          </a:p>
-          <a:p/>
-          <a:p>
-            <a:r>
-              <a:t>Conventional forecasting systems focus purely on statistical accuracy like MAE or WAPE. But accurate forecasts do not guarantee profitable decisions. When central DC inventory is scarce, a forecast error at the margin leads to empty shelves at high-volume stores and excess inventory at slow stores.</a:t>
-            </a:r>
-          </a:p>
-          <a:p/>
-          <a:p>
-            <a:r>
-              <a:t>In this project, I demonstrate how combining Decision-Focused Learning (PyEPO SPO+) with Distributionally Robust Optimization (DRO) directly solves the allocation decision problem, cutting total inventory costs by up to 35% under supply scarcity.</a:t>
+              <a:t>Open with the business decision rather than model complexity. Explain a scarce unit can be valuable at one store and excess at another. MU means synthetic monetary units. This is an interview research prototype, not an operational replenishment system.</a:t>
+            </a:r>
+          </a:p>
+          <a:p>
+            <a:r>
+              <a:t>Target duration: 65 seconds.</a:t>
+            </a:r>
+          </a:p>
+          <a:p>
+            <a:r>
+              <a:t>Sources: artifacts/demo_v2/summary_metrics.parquet, artifacts/m5_v2/summary_metrics.parquet, artifacts/m5_intermittent_v2/summary_metrics.parquet</a:t>
             </a:r>
           </a:p>
         </p:txBody>
@@ -596,25 +588,17 @@
           <a:lstStyle/>
           <a:p>
             <a:r>
-              <a:t>Let's examine the three architectural paradigms implemented in this repository.</a:t>
-            </a:r>
-          </a:p>
-          <a:p/>
-          <a:p>
-            <a:r>
-              <a:t>On the left is conventional Forecast-Then-Optimize (PTO). The forecast model minimizes Negative Log-Likelihood or RMSE. It does not know whether an SKU is scarce or plentiful, or whether a stockout penalty is 10x holding cost. When passed into the solver, symmetric errors lead to asymmetric stockout penalties.</a:t>
-            </a:r>
-          </a:p>
-          <a:p/>
-          <a:p>
-            <a:r>
-              <a:t>In the center is our Decision-Focused Learning (DFL) pipeline. Using PyEPO's Smart Predict-then-Optimize (SPO+) loss, the PyTorch neural network is trained with the MILP in the gradient loop. We mathematically prove that total inventory cost is linear in binary marginal unit shipments y[s,k]. The model focuses its capacity on the exact survival probability thresholds that determine which store gets the next unit.</a:t>
-            </a:r>
-          </a:p>
-          <a:p/>
-          <a:p>
-            <a:r>
-              <a:t>On the right is our full DFL + DRO integration. The DFL model supplies calibrated marginal probabilities. We draw joint scenarios preserving cross-store correlation using an empirical copula. Then, we solve a probability-reweighted DRO MILP whose ambiguity set is proven equivalent to CVaR at confidence alpha=0.90. This protects MR.DIY against correlated demand surges during promotional or holiday weeks.</a:t>
+              <a:t>Show Page A provenance and actual filters. ADI is daily inverse nonzero-sales frequency; do not claim a threshold absent from the selection rule. Discuss Walmart-to-MR.DIY domain shift. Twelve test weeks support a small case study, not a causal savings estimate.</a:t>
+            </a:r>
+          </a:p>
+          <a:p>
+            <a:r>
+              <a:t>Target duration: 75 seconds.</a:t>
+            </a:r>
+          </a:p>
+          <a:p>
+            <a:r>
+              <a:t>Sources: artifacts/demo_v2/summary_metrics.parquet, artifacts/m5_v2/summary_metrics.parquet, artifacts/m5_intermittent_v2/summary_metrics.parquet</a:t>
             </a:r>
           </a:p>
         </p:txBody>
@@ -684,25 +668,17 @@
           <a:lstStyle/>
           <a:p>
             <a:r>
-              <a:t>Here is the core scientific finding from our empirical M5 experiments: why decision-focused gradients outperform pure likelihood training under supply rationing.</a:t>
-            </a:r>
-          </a:p>
-          <a:p/>
-          <a:p>
-            <a:r>
-              <a:t>On our M5 validation ablation for HOUSEHOLD_1_055, increasing lambda_DFL from 0.0 (pure NLL) to 2.0 reduced validation decision regret by 25.9% (from 17.59 MU down to 13.04 MU). And in our out-of-sample 12-week multi-period carryover benchmark (L=0), dfl_dro cut total operating cost by 19.4% (1230.94 MU vs 1526.37 MU) and cut oracle regret by 55.0% (242.18 MU vs 537.60 MU) relative to supervised_pto!</a:t>
-            </a:r>
-          </a:p>
-          <a:p/>
-          <a:p>
-            <a:r>
-              <a:t>Why does this happen? Because in retail allocation, not all prediction errors are equal. If a store has 15 units of demand and 2 units of stock, predicting 10 vs 14 does not change the fact that the store desperately needs units. But predicting whether a store's demand is 2 vs 3 determines whether allocating that 3rd unit prevents a stockout or sits unsold.</a:t>
-            </a:r>
-          </a:p>
-          <a:p/>
-          <a:p>
-            <a:r>
-              <a:t>DFL gradients through PyEPO's SPO+ loss specifically penalize errors that flip the ranking between competing stores. Units that don't affect the active basis receive zero gradient.</a:t>
+              <a:t>Define PTO and DFL in plain language. The feasible set is fixed during SPO+ training; uncertain demand maps to objective coefficients. The optimizer participates in learning. This is probability-reweighting DRO, not Wasserstein DRO. Scenario dependence is estimated on training only; PMF temperature is selected on validation.</a:t>
+            </a:r>
+          </a:p>
+          <a:p>
+            <a:r>
+              <a:t>Target duration: 90 seconds.</a:t>
+            </a:r>
+          </a:p>
+          <a:p>
+            <a:r>
+              <a:t>Sources: artifacts/demo_v2/summary_metrics.parquet, artifacts/m5_v2/summary_metrics.parquet, artifacts/m5_intermittent_v2/summary_metrics.parquet</a:t>
             </a:r>
           </a:p>
         </p:txBody>
@@ -772,31 +748,17 @@
           <a:lstStyle/>
           <a:p>
             <a:r>
-              <a:t>A senior Decision Intelligence professional must provide actionable business rules, not just algorithms. Slide 4 presents the Decision Policy Matrix I developed for MR.DIY category managers.</a:t>
-            </a:r>
-          </a:p>
-          <a:p/>
-          <a:p>
-            <a:r>
-              <a:t>Regime A is our high-stakes battleground: Fast-moving items under supply shortages. Here, DFL + DRO is king, delivering up to 35% cost reductions.</a:t>
-            </a:r>
-          </a:p>
-          <a:p/>
-          <a:p>
-            <a:r>
-              <a:t>Regime B covers intermittent hardware tools. Because demand is often zero with sudden sporadic spikes, pure DFL gradients can be noisy. Our empirical tests proved that a zero-inflated supervised PMF coupled with DRO scenario reweighting is the most reliable policy, reducing tail risk by 28%.</a:t>
-            </a:r>
-          </a:p>
-          <a:p/>
-          <a:p>
-            <a:r>
-              <a:t>Regime C is equally important: For cheap, slow-moving DIY fasteners with abundant stock, running a complex MILP yields diminishing returns. Simple proportional allocation performs within 5% of optimal. As a decision scientist, I recommend keeping it simple where optimization does not move the needle.</a:t>
-            </a:r>
-          </a:p>
-          <a:p/>
-          <a:p>
-            <a:r>
-              <a:t>Finally, Regime D addresses executive service-level mandates: Our service-level constrained MILP explicitly proves whether warehouse inventory can physically satisfy the target fill rate, or reports the exact supply shortfall.</a:t>
+              <a:t>The oracle knows future demand only for evaluation and never supplies a realistic recommendation. Explain why conserving total stock alone was insufficient and why matching the state/action contract matters. Show mathematical tests if asked. Negative or inconclusive model results are retained.</a:t>
+            </a:r>
+          </a:p>
+          <a:p>
+            <a:r>
+              <a:t>Target duration: 80 seconds.</a:t>
+            </a:r>
+          </a:p>
+          <a:p>
+            <a:r>
+              <a:t>Sources: artifacts/demo_v2/summary_metrics.parquet, artifacts/m5_v2/summary_metrics.parquet, artifacts/m5_intermittent_v2/summary_metrics.parquet</a:t>
             </a:r>
           </a:p>
         </p:txBody>
@@ -866,31 +828,17 @@
           <a:lstStyle/>
           <a:p>
             <a:r>
-              <a:t>Slide 5 summarizes our rigorous empirical benchmarks.</a:t>
-            </a:r>
-          </a:p>
-          <a:p/>
-          <a:p>
-            <a:r>
-              <a:t>Look at the progression across the 7 policies on Walmart M5 Household sales data. Starting from naive Equal Allocation at 1432.35 MU, moving to Supervised PTO achieves 1322.76 MU. Supervised DRO cuts this to 1315.14 MU and lowers tail risk. Decision-Focused Learning reduces mean cost further to 1312.70 MU.</a:t>
-            </a:r>
-          </a:p>
-          <a:p/>
-          <a:p>
-            <a:r>
-              <a:t>Notice the Clairvoyant Oracle at 1020.15 MU. In 100% of origins, every policy has non-negative regret against the oracle, proving mathematical validity.</a:t>
-            </a:r>
-          </a:p>
-          <a:p/>
-          <a:p>
-            <a:r>
-              <a:t>Most impressively, look at the multi-period carryover simulation where leftover inventory carries over across weeks: At L=0, our integrated dfl_dro policy wins #1 at 1230.94 MU, beating supervised_pto by -19.4% (-295 MU)! At L=1 with replenishment lead time, dfl_dro again wins #1 at 1526.90 MU, beating supervised_pto by -6.2%!</a:t>
-            </a:r>
-          </a:p>
-          <a:p/>
-          <a:p>
-            <a:r>
-              <a:t>Furthermore, across 3 independent training seeds—42, 101, and 202—dfl_pto beat supervised_pto in 100% of runs, confirming that the performance advantage is stable and repeatable.</a:t>
+              <a:t>Read the table candidly, including heuristic wins and losses by advanced methods. The two stochastic ablations and oracle are available in the full report. Explain a negative paired difference favors DFL+DRO; an interval crossing zero is inconclusive on this sample. These costs are modelled outcomes, not revenue or proven operational savings.</a:t>
+            </a:r>
+          </a:p>
+          <a:p>
+            <a:r>
+              <a:t>Target duration: 90 seconds.</a:t>
+            </a:r>
+          </a:p>
+          <a:p>
+            <a:r>
+              <a:t>Sources: artifacts/demo_v2/summary_metrics.parquet, artifacts/m5_v2/summary_metrics.parquet, artifacts/m5_intermittent_v2/summary_metrics.parquet</a:t>
             </a:r>
           </a:p>
         </p:txBody>
@@ -960,31 +908,17 @@
           <a:lstStyle/>
           <a:p>
             <a:r>
-              <a:t>How do we take this from a verified research prototype to production at MR.DIY? Slide 6 outlines a pragmatic, phased roadmap.</a:t>
-            </a:r>
-          </a:p>
-          <a:p/>
-          <a:p>
-            <a:r>
-              <a:t>In Stage 1, we deploy the system in 'shadow mode' alongside the current ERP. It ingests daily shipment cutoffs and audits data feeds for leakage with zero operational risk.</a:t>
-            </a:r>
-          </a:p>
-          <a:p/>
-          <a:p>
-            <a:r>
-              <a:t>In Stage 2, we launch a pilot on the top 200 high-margin Household SKUs using our Streamlit decision dashboard. Planners can review allocations, run what-if simulations, and override parameters.</a:t>
-            </a:r>
-          </a:p>
-          <a:p/>
-          <a:p>
-            <a:r>
-              <a:t>In Stage 3, we expand the single-SKU formulation to joint multi-SKU cubic capacity and pallet truckload constraints using sparse HiGHS MILPs.</a:t>
-            </a:r>
-          </a:p>
-          <a:p/>
-          <a:p>
-            <a:r>
-              <a:t>In Stage 4, we close the loop with direct WMS API order release, backed by automated regret drift monitoring. We project an overall 12% to 18% reduction in inventory holding and stockout costs across participating categories.</a:t>
+              <a:t>Leave the dashboard running before the interview. Use one controlled change, then return to defaults. Do not promise a latency threshold: actual solver and pipeline timings are in the artifacts. If the browser fails, use the local PDF or HTML and screenshots; do not rebuild models during the interview.</a:t>
+            </a:r>
+          </a:p>
+          <a:p>
+            <a:r>
+              <a:t>Target duration: 70 seconds.</a:t>
+            </a:r>
+          </a:p>
+          <a:p>
+            <a:r>
+              <a:t>Sources: artifacts/demo_v2/summary_metrics.parquet, artifacts/m5_v2/summary_metrics.parquet, artifacts/m5_intermittent_v2/summary_metrics.parquet</a:t>
             </a:r>
           </a:p>
         </p:txBody>
@@ -1054,25 +988,17 @@
           <a:lstStyle/>
           <a:p>
             <a:r>
-              <a:t>In this technical appendix, I provide the exact mathematical proofs and engineering specifications for the panel's review.</a:t>
-            </a:r>
-          </a:p>
-          <a:p/>
-          <a:p>
-            <a:r>
-              <a:t>Key highlights include: First, our linear marginal identity proving that incremental inventory decisions can be represented as binary variables y[s,k] with exact marginal cost coefficients. Second, the duality proof showing that the scenario-probability reweighting ambiguity set P_alpha is mathematically identical to Rockafellar and Uryasev's CVaR formulation.</a:t>
-            </a:r>
-          </a:p>
-          <a:p/>
-          <a:p>
-            <a:r>
-              <a:t>Third, our computational stack: The entire solution is open-source, running HiGHS via scipy.optimize.milp. Solving a 50-scenario DRO instance takes under 40 milliseconds on a standard CPU, ensuring that MR.DIY does not need costly Gurobi licenses or GPU clusters to achieve enterprise-grade decision intelligence.</a:t>
-            </a:r>
-          </a:p>
-          <a:p/>
-          <a:p>
-            <a:r>
-              <a:t>Thank you for your time and consideration. I would be delighted to take any questions on the mathematics, the code, or the business application.</a:t>
+              <a:t>Close with a measured proposal. Describe the data needed from an ERP and warehouse system and how to compare against the incumbent policy. Keep humans responsible for orders. Invite questions about calibration, solver feasibility, simple baselines and why robust optimization can cost more.</a:t>
+            </a:r>
+          </a:p>
+          <a:p>
+            <a:r>
+              <a:t>Target duration: 70 seconds.</a:t>
+            </a:r>
+          </a:p>
+          <a:p>
+            <a:r>
+              <a:t>Sources: artifacts/demo_v2/summary_metrics.parquet, artifacts/m5_v2/summary_metrics.parquet, artifacts/m5_intermittent_v2/summary_metrics.parquet</a:t>
             </a:r>
           </a:p>
         </p:txBody>
@@ -4080,57 +4006,14 @@
       <p:grpSpPr/>
       <p:sp>
         <p:nvSpPr>
-          <p:cNvPr id="2" name="Rectangle 1"/>
-          <p:cNvSpPr/>
+          <p:cNvPr id="2" name="TextBox 1"/>
+          <p:cNvSpPr txBox="1"/>
           <p:nvPr/>
         </p:nvSpPr>
         <p:spPr>
           <a:xfrm>
-            <a:off x="0" y="0"/>
-            <a:ext cx="12191695" cy="6858000"/>
-          </a:xfrm>
-          <a:prstGeom prst="rect">
-            <a:avLst/>
-          </a:prstGeom>
-          <a:solidFill>
-            <a:srgbClr val="0F172A"/>
-          </a:solidFill>
-          <a:ln>
-            <a:noFill/>
-          </a:ln>
-        </p:spPr>
-        <p:style>
-          <a:lnRef idx="1">
-            <a:schemeClr val="accent1"/>
-          </a:lnRef>
-          <a:fillRef idx="3">
-            <a:schemeClr val="accent1"/>
-          </a:fillRef>
-          <a:effectRef idx="2">
-            <a:schemeClr val="accent1"/>
-          </a:effectRef>
-          <a:fontRef idx="minor">
-            <a:schemeClr val="lt1"/>
-          </a:fontRef>
-        </p:style>
-        <p:txBody>
-          <a:bodyPr rtlCol="0" anchor="ctr"/>
-          <a:lstStyle/>
-          <a:p>
-            <a:pPr algn="ctr"/>
-          </a:p>
-        </p:txBody>
-      </p:sp>
-      <p:sp>
-        <p:nvSpPr>
-          <p:cNvPr id="3" name="TextBox 2"/>
-          <p:cNvSpPr txBox="1"/>
-          <p:nvPr/>
-        </p:nvSpPr>
-        <p:spPr>
-          <a:xfrm>
-            <a:off x="1097280" y="1371600"/>
-            <a:ext cx="10058400" cy="3200400"/>
+            <a:off x="594360" y="365760"/>
+            <a:ext cx="10972800" cy="274320"/>
           </a:xfrm>
           <a:prstGeom prst="rect">
             <a:avLst/>
@@ -4145,106 +4028,31 @@
           <a:p>
             <a:pPr>
               <a:spcAft>
-                <a:spcPts val="1400"/>
+                <a:spcPts val="800"/>
               </a:spcAft>
-              <a:defRPr sz="1200" b="1">
-                <a:solidFill>
-                  <a:srgbClr val="D97706"/>
-                </a:solidFill>
+              <a:defRPr sz="1100" b="1">
+                <a:solidFill>
+                  <a:srgbClr val="0369A1"/>
+                </a:solidFill>
+                <a:latin typeface="Arial"/>
               </a:defRPr>
             </a:pPr>
             <a:r>
-              <a:t>MR.DIY INTERVIEW CASE STUDY — DATA SCIENTIST EXECUTIVE (DECISION INTELLIGENCE)</a:t>
-            </a:r>
-          </a:p>
-          <a:p>
-            <a:pPr>
-              <a:spcAft>
-                <a:spcPts val="1200"/>
-              </a:spcAft>
-              <a:defRPr sz="3600" b="1">
-                <a:solidFill>
-                  <a:srgbClr val="FFFFFF"/>
-                </a:solidFill>
-              </a:defRPr>
-            </a:pPr>
-            <a:r>
-              <a:t>Decision-Focused &amp; Distributionally Robust</a:t>
-            </a:r>
-            <a:br/>
-            <a:r>
-              <a:t>Inventory Allocation</a:t>
-            </a:r>
-          </a:p>
-          <a:p>
-            <a:pPr>
-              <a:defRPr sz="1800">
-                <a:solidFill>
-                  <a:srgbClr val="CBD5E1"/>
-                </a:solidFill>
-              </a:defRPr>
-            </a:pPr>
-            <a:r>
-              <a:t>End-to-End Decision Intelligence Under Asymmetric Shortage Penalties &amp; Correlated Demand Surges</a:t>
-            </a:r>
-          </a:p>
-        </p:txBody>
-      </p:sp>
-      <p:sp>
-        <p:nvSpPr>
-          <p:cNvPr id="4" name="Rounded Rectangle 3"/>
-          <p:cNvSpPr/>
+              <a:t>DECISION INTELLIGENCE / INTERVIEW RESEARCH PROTOTYPE</a:t>
+            </a:r>
+          </a:p>
+        </p:txBody>
+      </p:sp>
+      <p:sp>
+        <p:nvSpPr>
+          <p:cNvPr id="3" name="TextBox 2"/>
+          <p:cNvSpPr txBox="1"/>
           <p:nvPr/>
         </p:nvSpPr>
         <p:spPr>
           <a:xfrm>
-            <a:off x="1097280" y="4754880"/>
-            <a:ext cx="3108960" cy="1463040"/>
-          </a:xfrm>
-          <a:prstGeom prst="roundRect">
-            <a:avLst/>
-          </a:prstGeom>
-          <a:solidFill>
-            <a:srgbClr val="F8FAFC"/>
-          </a:solidFill>
-          <a:ln w="19050">
-            <a:solidFill>
-              <a:srgbClr val="E2E8F0"/>
-            </a:solidFill>
-          </a:ln>
-        </p:spPr>
-        <p:style>
-          <a:lnRef idx="1">
-            <a:schemeClr val="accent1"/>
-          </a:lnRef>
-          <a:fillRef idx="3">
-            <a:schemeClr val="accent1"/>
-          </a:fillRef>
-          <a:effectRef idx="2">
-            <a:schemeClr val="accent1"/>
-          </a:effectRef>
-          <a:fontRef idx="minor">
-            <a:schemeClr val="lt1"/>
-          </a:fontRef>
-        </p:style>
-        <p:txBody>
-          <a:bodyPr rtlCol="0" anchor="ctr"/>
-          <a:lstStyle/>
-          <a:p>
-            <a:pPr algn="ctr"/>
-          </a:p>
-        </p:txBody>
-      </p:sp>
-      <p:sp>
-        <p:nvSpPr>
-          <p:cNvPr id="5" name="TextBox 4"/>
-          <p:cNvSpPr txBox="1"/>
-          <p:nvPr/>
-        </p:nvSpPr>
-        <p:spPr>
-          <a:xfrm>
-            <a:off x="1280160" y="4892040"/>
-            <a:ext cx="2743200" cy="1188720"/>
+            <a:off x="594360" y="822960"/>
+            <a:ext cx="10972800" cy="594360"/>
           </a:xfrm>
           <a:prstGeom prst="rect">
             <a:avLst/>
@@ -4261,118 +4069,29 @@
               <a:spcAft>
                 <a:spcPts val="800"/>
               </a:spcAft>
-              <a:defRPr sz="1400" b="1">
-                <a:solidFill>
-                  <a:srgbClr val="D97706"/>
-                </a:solidFill>
+              <a:defRPr sz="2800" b="1">
+                <a:solidFill>
+                  <a:srgbClr val="0F172A"/>
+                </a:solidFill>
+                <a:latin typeface="Arial"/>
               </a:defRPr>
             </a:pPr>
             <a:r>
-              <a:t>Business Challenge</a:t>
-            </a:r>
-          </a:p>
-          <a:p>
-            <a:pPr>
-              <a:spcAft>
-                <a:spcPts val="400"/>
-              </a:spcAft>
-              <a:defRPr sz="1100">
-                <a:solidFill>
-                  <a:srgbClr val="1E293B"/>
-                </a:solidFill>
-              </a:defRPr>
-            </a:pPr>
-            <a:r>
-              <a:t>• 1,200+ MR.DIY stores competing for central DC stock</a:t>
-            </a:r>
-          </a:p>
-          <a:p>
-            <a:pPr>
-              <a:spcAft>
-                <a:spcPts val="400"/>
-              </a:spcAft>
-              <a:defRPr sz="1100">
-                <a:solidFill>
-                  <a:srgbClr val="1E293B"/>
-                </a:solidFill>
-              </a:defRPr>
-            </a:pPr>
-            <a:r>
-              <a:t>• Asymmetric cost: stockouts cost 8-15x holding cost</a:t>
-            </a:r>
-          </a:p>
-          <a:p>
-            <a:pPr>
-              <a:spcAft>
-                <a:spcPts val="400"/>
-              </a:spcAft>
-              <a:defRPr sz="1100">
-                <a:solidFill>
-                  <a:srgbClr val="1E293B"/>
-                </a:solidFill>
-              </a:defRPr>
-            </a:pPr>
-            <a:r>
-              <a:t>• Severe warehouse scarcity (W &lt; sum D) during peak</a:t>
-            </a:r>
-          </a:p>
-        </p:txBody>
-      </p:sp>
-      <p:sp>
-        <p:nvSpPr>
-          <p:cNvPr id="6" name="Rounded Rectangle 5"/>
-          <p:cNvSpPr/>
+              <a:t>Inventory allocation: from forecasts to decisions</a:t>
+            </a:r>
+          </a:p>
+        </p:txBody>
+      </p:sp>
+      <p:sp>
+        <p:nvSpPr>
+          <p:cNvPr id="4" name="TextBox 3"/>
+          <p:cNvSpPr txBox="1"/>
           <p:nvPr/>
         </p:nvSpPr>
         <p:spPr>
           <a:xfrm>
-            <a:off x="4480560" y="4754880"/>
-            <a:ext cx="3108960" cy="1463040"/>
-          </a:xfrm>
-          <a:prstGeom prst="roundRect">
-            <a:avLst/>
-          </a:prstGeom>
-          <a:solidFill>
-            <a:srgbClr val="F8FAFC"/>
-          </a:solidFill>
-          <a:ln w="19050">
-            <a:solidFill>
-              <a:srgbClr val="E2E8F0"/>
-            </a:solidFill>
-          </a:ln>
-        </p:spPr>
-        <p:style>
-          <a:lnRef idx="1">
-            <a:schemeClr val="accent1"/>
-          </a:lnRef>
-          <a:fillRef idx="3">
-            <a:schemeClr val="accent1"/>
-          </a:fillRef>
-          <a:effectRef idx="2">
-            <a:schemeClr val="accent1"/>
-          </a:effectRef>
-          <a:fontRef idx="minor">
-            <a:schemeClr val="lt1"/>
-          </a:fontRef>
-        </p:style>
-        <p:txBody>
-          <a:bodyPr rtlCol="0" anchor="ctr"/>
-          <a:lstStyle/>
-          <a:p>
-            <a:pPr algn="ctr"/>
-          </a:p>
-        </p:txBody>
-      </p:sp>
-      <p:sp>
-        <p:nvSpPr>
-          <p:cNvPr id="7" name="TextBox 6"/>
-          <p:cNvSpPr txBox="1"/>
-          <p:nvPr/>
-        </p:nvSpPr>
-        <p:spPr>
-          <a:xfrm>
-            <a:off x="4663440" y="4892040"/>
-            <a:ext cx="2743200" cy="1188720"/>
+            <a:off x="594360" y="1508760"/>
+            <a:ext cx="10972800" cy="457200"/>
           </a:xfrm>
           <a:prstGeom prst="rect">
             <a:avLst/>
@@ -4389,118 +4108,29 @@
               <a:spcAft>
                 <a:spcPts val="800"/>
               </a:spcAft>
-              <a:defRPr sz="1400" b="1">
-                <a:solidFill>
-                  <a:srgbClr val="0284C7"/>
-                </a:solidFill>
+              <a:defRPr sz="1500" b="0">
+                <a:solidFill>
+                  <a:srgbClr val="475569"/>
+                </a:solidFill>
+                <a:latin typeface="Arial"/>
               </a:defRPr>
             </a:pPr>
             <a:r>
-              <a:t>Technical Innovation</a:t>
-            </a:r>
-          </a:p>
-          <a:p>
-            <a:pPr>
-              <a:spcAft>
-                <a:spcPts val="400"/>
-              </a:spcAft>
-              <a:defRPr sz="1100">
-                <a:solidFill>
-                  <a:srgbClr val="1E293B"/>
-                </a:solidFill>
-              </a:defRPr>
-            </a:pPr>
-            <a:r>
-              <a:t>• SPO+ surrogate loss for direct regret minimization</a:t>
-            </a:r>
-          </a:p>
-          <a:p>
-            <a:pPr>
-              <a:spcAft>
-                <a:spcPts val="400"/>
-              </a:spcAft>
-              <a:defRPr sz="1100">
-                <a:solidFill>
-                  <a:srgbClr val="1E293B"/>
-                </a:solidFill>
-              </a:defRPr>
-            </a:pPr>
-            <a:r>
-              <a:t>• Explicit scenario-reweighting DRO (CVaR_alpha equivalence)</a:t>
-            </a:r>
-          </a:p>
-          <a:p>
-            <a:pPr>
-              <a:spcAft>
-                <a:spcPts val="400"/>
-              </a:spcAft>
-              <a:defRPr sz="1100">
-                <a:solidFill>
-                  <a:srgbClr val="1E293B"/>
-                </a:solidFill>
-              </a:defRPr>
-            </a:pPr>
-            <a:r>
-              <a:t>• Zero-leakage rolling nonanticipative simulation</a:t>
-            </a:r>
-          </a:p>
-        </p:txBody>
-      </p:sp>
-      <p:sp>
-        <p:nvSpPr>
-          <p:cNvPr id="8" name="Rounded Rectangle 7"/>
-          <p:cNvSpPr/>
+              <a:t>Interview research case study | Decision intelligence for multi-store retail</a:t>
+            </a:r>
+          </a:p>
+        </p:txBody>
+      </p:sp>
+      <p:sp>
+        <p:nvSpPr>
+          <p:cNvPr id="5" name="TextBox 4"/>
+          <p:cNvSpPr txBox="1"/>
           <p:nvPr/>
         </p:nvSpPr>
         <p:spPr>
           <a:xfrm>
-            <a:off x="7863840" y="4754880"/>
-            <a:ext cx="3200400" cy="1463040"/>
-          </a:xfrm>
-          <a:prstGeom prst="roundRect">
-            <a:avLst/>
-          </a:prstGeom>
-          <a:solidFill>
-            <a:srgbClr val="F8FAFC"/>
-          </a:solidFill>
-          <a:ln w="19050">
-            <a:solidFill>
-              <a:srgbClr val="E2E8F0"/>
-            </a:solidFill>
-          </a:ln>
-        </p:spPr>
-        <p:style>
-          <a:lnRef idx="1">
-            <a:schemeClr val="accent1"/>
-          </a:lnRef>
-          <a:fillRef idx="3">
-            <a:schemeClr val="accent1"/>
-          </a:fillRef>
-          <a:effectRef idx="2">
-            <a:schemeClr val="accent1"/>
-          </a:effectRef>
-          <a:fontRef idx="minor">
-            <a:schemeClr val="lt1"/>
-          </a:fontRef>
-        </p:style>
-        <p:txBody>
-          <a:bodyPr rtlCol="0" anchor="ctr"/>
-          <a:lstStyle/>
-          <a:p>
-            <a:pPr algn="ctr"/>
-          </a:p>
-        </p:txBody>
-      </p:sp>
-      <p:sp>
-        <p:nvSpPr>
-          <p:cNvPr id="9" name="TextBox 8"/>
-          <p:cNvSpPr txBox="1"/>
-          <p:nvPr/>
-        </p:nvSpPr>
-        <p:spPr>
-          <a:xfrm>
-            <a:off x="8046720" y="4892040"/>
-            <a:ext cx="2834640" cy="1188720"/>
+            <a:off x="685800" y="2148840"/>
+            <a:ext cx="10835640" cy="4206240"/>
           </a:xfrm>
           <a:prstGeom prst="rect">
             <a:avLst/>
@@ -4517,59 +4147,102 @@
               <a:spcAft>
                 <a:spcPts val="800"/>
               </a:spcAft>
-              <a:defRPr sz="1400" b="1">
-                <a:solidFill>
-                  <a:srgbClr val="10B981"/>
-                </a:solidFill>
+              <a:defRPr sz="1900" b="0">
+                <a:solidFill>
+                  <a:srgbClr val="1E293B"/>
+                </a:solidFill>
+                <a:latin typeface="Arial"/>
               </a:defRPr>
             </a:pPr>
             <a:r>
-              <a:t>Operational Proof</a:t>
+              <a:t>• Decision: how many units should a warehouse send to each store when stock and shelf space are limited?</a:t>
             </a:r>
           </a:p>
           <a:p>
             <a:pPr>
               <a:spcAft>
-                <a:spcPts val="400"/>
+                <a:spcPts val="800"/>
               </a:spcAft>
-              <a:defRPr sz="1100">
+              <a:defRPr sz="1900" b="0">
                 <a:solidFill>
                   <a:srgbClr val="1E293B"/>
                 </a:solidFill>
+                <a:latin typeface="Arial"/>
               </a:defRPr>
             </a:pPr>
             <a:r>
-              <a:t>• 15%–35% cost reduction under severe supply scarcity</a:t>
+              <a:t>• Objective: reduce shortage, holding and shipping cost while respecting integer inventory constraints.</a:t>
             </a:r>
           </a:p>
           <a:p>
             <a:pPr>
               <a:spcAft>
-                <a:spcPts val="400"/>
+                <a:spcPts val="800"/>
               </a:spcAft>
-              <a:defRPr sz="1100">
+              <a:defRPr sz="1900" b="0">
                 <a:solidFill>
                   <a:srgbClr val="1E293B"/>
                 </a:solidFill>
+                <a:latin typeface="Arial"/>
               </a:defRPr>
             </a:pPr>
             <a:r>
-              <a:t>• HiGHS open-source MILP solves in &lt;40ms per cluster</a:t>
+              <a:t>• Deliverable: a CPU-based experiment pipeline, mathematical checks and an offline decision dashboard.</a:t>
             </a:r>
           </a:p>
           <a:p>
             <a:pPr>
               <a:spcAft>
-                <a:spcPts val="400"/>
+                <a:spcPts val="800"/>
               </a:spcAft>
-              <a:defRPr sz="1100">
+              <a:defRPr sz="1900" b="0">
                 <a:solidFill>
                   <a:srgbClr val="1E293B"/>
                 </a:solidFill>
+                <a:latin typeface="Arial"/>
               </a:defRPr>
             </a:pPr>
             <a:r>
-              <a:t>• Evaluated on real Walmart M5 Household sales proxy</a:t>
+              <a:t>• Evidence: Walmart M5 sales proxies with synthetic operating economics; no claim of actual retailer savings.</a:t>
+            </a:r>
+          </a:p>
+        </p:txBody>
+      </p:sp>
+      <p:sp>
+        <p:nvSpPr>
+          <p:cNvPr id="6" name="TextBox 5"/>
+          <p:cNvSpPr txBox="1"/>
+          <p:nvPr/>
+        </p:nvSpPr>
+        <p:spPr>
+          <a:xfrm>
+            <a:off x="594360" y="6428232"/>
+            <a:ext cx="10972800" cy="228600"/>
+          </a:xfrm>
+          <a:prstGeom prst="rect">
+            <a:avLst/>
+          </a:prstGeom>
+          <a:noFill/>
+        </p:spPr>
+        <p:txBody>
+          <a:bodyPr wrap="square">
+            <a:spAutoFit/>
+          </a:bodyPr>
+          <a:lstStyle/>
+          <a:p>
+            <a:pPr>
+              <a:spcAft>
+                <a:spcPts val="800"/>
+              </a:spcAft>
+              <a:defRPr sz="1000" b="0">
+                <a:solidFill>
+                  <a:srgbClr val="64748B"/>
+                </a:solidFill>
+                <a:latin typeface="Arial"/>
+              </a:defRPr>
+            </a:pPr>
+            <a:r>
+              <a:t>Synthetic MU economics | Corrected v2 experiments | 1/7</a:t>
             </a:r>
           </a:p>
         </p:txBody>
@@ -4600,8 +4273,8 @@
         </p:nvSpPr>
         <p:spPr>
           <a:xfrm>
-            <a:off x="731520" y="457200"/>
-            <a:ext cx="7315200" cy="274320"/>
+            <a:off x="594360" y="365760"/>
+            <a:ext cx="10972800" cy="274320"/>
           </a:xfrm>
           <a:prstGeom prst="rect">
             <a:avLst/>
@@ -4615,14 +4288,18 @@
           <a:lstStyle/>
           <a:p>
             <a:pPr>
-              <a:defRPr sz="1000" b="1">
-                <a:solidFill>
-                  <a:srgbClr val="D97706"/>
-                </a:solidFill>
+              <a:spcAft>
+                <a:spcPts val="800"/>
+              </a:spcAft>
+              <a:defRPr sz="1100" b="1">
+                <a:solidFill>
+                  <a:srgbClr val="0369A1"/>
+                </a:solidFill>
+                <a:latin typeface="Arial"/>
               </a:defRPr>
             </a:pPr>
             <a:r>
-              <a:t>MR.DIY DECISION INTELLIGENCE</a:t>
+              <a:t>DECISION INTELLIGENCE / INTERVIEW RESEARCH PROTOTYPE</a:t>
             </a:r>
           </a:p>
         </p:txBody>
@@ -4635,8 +4312,8 @@
         </p:nvSpPr>
         <p:spPr>
           <a:xfrm>
-            <a:off x="731520" y="731520"/>
-            <a:ext cx="10515600" cy="548640"/>
+            <a:off x="594360" y="822960"/>
+            <a:ext cx="10972800" cy="594360"/>
           </a:xfrm>
           <a:prstGeom prst="rect">
             <a:avLst/>
@@ -4650,14 +4327,18 @@
           <a:lstStyle/>
           <a:p>
             <a:pPr>
-              <a:defRPr sz="2200" b="1">
+              <a:spcAft>
+                <a:spcPts val="800"/>
+              </a:spcAft>
+              <a:defRPr sz="2800" b="1">
                 <a:solidFill>
                   <a:srgbClr val="0F172A"/>
                 </a:solidFill>
+                <a:latin typeface="Arial"/>
               </a:defRPr>
             </a:pPr>
             <a:r>
-              <a:t>End-to-End System Architecture: PTO vs. DFL vs. DRO</a:t>
+              <a:t>Data and assumptions define the experiment</a:t>
             </a:r>
           </a:p>
         </p:txBody>
@@ -4670,8 +4351,8 @@
         </p:nvSpPr>
         <p:spPr>
           <a:xfrm>
-            <a:off x="731520" y="1280160"/>
-            <a:ext cx="10515600" cy="365760"/>
+            <a:off x="594360" y="1508760"/>
+            <a:ext cx="10972800" cy="457200"/>
           </a:xfrm>
           <a:prstGeom prst="rect">
             <a:avLst/>
@@ -4685,73 +4366,32 @@
           <a:lstStyle/>
           <a:p>
             <a:pPr>
-              <a:defRPr sz="1200">
-                <a:solidFill>
-                  <a:srgbClr val="64748B"/>
-                </a:solidFill>
+              <a:spcAft>
+                <a:spcPts val="800"/>
+              </a:spcAft>
+              <a:defRPr sz="1500" b="0">
+                <a:solidFill>
+                  <a:srgbClr val="475569"/>
+                </a:solidFill>
+                <a:latin typeface="Arial"/>
               </a:defRPr>
             </a:pPr>
             <a:r>
-              <a:t>A mathematically rigorous progression from classical two-stage heuristics to integrated decision intelligence.</a:t>
-            </a:r>
-          </a:p>
-        </p:txBody>
-      </p:sp>
-      <p:sp>
-        <p:nvSpPr>
-          <p:cNvPr id="5" name="Rounded Rectangle 4"/>
-          <p:cNvSpPr/>
+              <a:t>Chronological evaluation and explicit provenance</a:t>
+            </a:r>
+          </a:p>
+        </p:txBody>
+      </p:sp>
+      <p:sp>
+        <p:nvSpPr>
+          <p:cNvPr id="5" name="TextBox 4"/>
+          <p:cNvSpPr txBox="1"/>
           <p:nvPr/>
         </p:nvSpPr>
         <p:spPr>
           <a:xfrm>
-            <a:off x="731520" y="1828800"/>
-            <a:ext cx="3291840" cy="4389120"/>
-          </a:xfrm>
-          <a:prstGeom prst="roundRect">
-            <a:avLst/>
-          </a:prstGeom>
-          <a:solidFill>
-            <a:srgbClr val="F8FAFC"/>
-          </a:solidFill>
-          <a:ln w="19050">
-            <a:solidFill>
-              <a:srgbClr val="E2E8F0"/>
-            </a:solidFill>
-          </a:ln>
-        </p:spPr>
-        <p:style>
-          <a:lnRef idx="1">
-            <a:schemeClr val="accent1"/>
-          </a:lnRef>
-          <a:fillRef idx="3">
-            <a:schemeClr val="accent1"/>
-          </a:fillRef>
-          <a:effectRef idx="2">
-            <a:schemeClr val="accent1"/>
-          </a:effectRef>
-          <a:fontRef idx="minor">
-            <a:schemeClr val="lt1"/>
-          </a:fontRef>
-        </p:style>
-        <p:txBody>
-          <a:bodyPr rtlCol="0" anchor="ctr"/>
-          <a:lstStyle/>
-          <a:p>
-            <a:pPr algn="ctr"/>
-          </a:p>
-        </p:txBody>
-      </p:sp>
-      <p:sp>
-        <p:nvSpPr>
-          <p:cNvPr id="6" name="TextBox 5"/>
-          <p:cNvSpPr txBox="1"/>
-          <p:nvPr/>
-        </p:nvSpPr>
-        <p:spPr>
-          <a:xfrm>
-            <a:off x="914400" y="1965960"/>
-            <a:ext cx="2926080" cy="4114800"/>
+            <a:off x="685800" y="2148840"/>
+            <a:ext cx="10835640" cy="4206240"/>
           </a:xfrm>
           <a:prstGeom prst="rect">
             <a:avLst/>
@@ -4768,148 +4408,93 @@
               <a:spcAft>
                 <a:spcPts val="800"/>
               </a:spcAft>
-              <a:defRPr sz="1400" b="1">
-                <a:solidFill>
-                  <a:srgbClr val="64748B"/>
-                </a:solidFill>
+              <a:defRPr sz="1900" b="0">
+                <a:solidFill>
+                  <a:srgbClr val="1E293B"/>
+                </a:solidFill>
+                <a:latin typeface="Arial"/>
               </a:defRPr>
             </a:pPr>
             <a:r>
-              <a:t>1. Conventional PTO</a:t>
+              <a:t>• Regular and intermittent cohorts: 5 stores and 10 HOUSEHOLD SKUs each, selected using training history only.</a:t>
             </a:r>
           </a:p>
           <a:p>
             <a:pPr>
               <a:spcAft>
-                <a:spcPts val="400"/>
+                <a:spcPts val="800"/>
               </a:spcAft>
-              <a:defRPr sz="1100">
+              <a:defRPr sz="1900" b="0">
                 <a:solidFill>
                   <a:srgbClr val="1E293B"/>
                 </a:solidFill>
+                <a:latin typeface="Arial"/>
               </a:defRPr>
             </a:pPr>
             <a:r>
-              <a:t>• Architecture: Forecast Model -&gt; Separate MILP.</a:t>
+              <a:t>• Each origin predicts the next seven calendar days. Main M5 split: 100 training, 8 validation and 12 test origins.</a:t>
             </a:r>
           </a:p>
           <a:p>
             <a:pPr>
               <a:spcAft>
-                <a:spcPts val="400"/>
+                <a:spcPts val="800"/>
               </a:spcAft>
-              <a:defRPr sz="1100">
+              <a:defRPr sz="1900" b="0">
                 <a:solidFill>
                   <a:srgbClr val="1E293B"/>
                 </a:solidFill>
+                <a:latin typeface="Arial"/>
               </a:defRPr>
             </a:pPr>
             <a:r>
-              <a:t>• Loss Function: Maximum Likelihood Estimation (NLL) / RMSE over historical sales.</a:t>
+              <a:t>• Features use completed history; calendar events are known in advance. Future realized prices are excluded.</a:t>
             </a:r>
           </a:p>
           <a:p>
             <a:pPr>
               <a:spcAft>
-                <a:spcPts val="400"/>
+                <a:spcPts val="800"/>
               </a:spcAft>
-              <a:defRPr sz="1100">
+              <a:defRPr sz="1900" b="0">
                 <a:solidFill>
                   <a:srgbClr val="1E293B"/>
                 </a:solidFill>
+                <a:latin typeface="Arial"/>
               </a:defRPr>
             </a:pPr>
             <a:r>
-              <a:t>• Blind Spot: Treats positive and negative forecast errors symmetrically.</a:t>
+              <a:t>• Stock, supply, capacity and MU costs are synthetic. Observed sales can understate latent demand during stockouts.</a:t>
             </a:r>
           </a:p>
           <a:p>
             <a:pPr>
               <a:spcAft>
-                <a:spcPts val="400"/>
+                <a:spcPts val="800"/>
               </a:spcAft>
-              <a:defRPr sz="1100">
+              <a:defRPr sz="1900" b="0">
                 <a:solidFill>
                   <a:srgbClr val="1E293B"/>
                 </a:solidFill>
+                <a:latin typeface="Arial"/>
               </a:defRPr>
             </a:pPr>
             <a:r>
-              <a:t>• Failure Mode: Ignores store capacity bounds and warehouse rationing during training.</a:t>
-            </a:r>
-          </a:p>
-          <a:p>
-            <a:pPr>
-              <a:spcAft>
-                <a:spcPts val="400"/>
-              </a:spcAft>
-              <a:defRPr sz="1100">
-                <a:solidFill>
-                  <a:srgbClr val="1E293B"/>
-                </a:solidFill>
-              </a:defRPr>
-            </a:pPr>
-            <a:r>
-              <a:t>• Result: High downstream regret when warehouse stock is insufficient.</a:t>
-            </a:r>
-          </a:p>
-        </p:txBody>
-      </p:sp>
-      <p:sp>
-        <p:nvSpPr>
-          <p:cNvPr id="7" name="Rounded Rectangle 6"/>
-          <p:cNvSpPr/>
+              <a:t>• The v2 runs reuse previously inspected test periods: these are corrected retrospective experiments.</a:t>
+            </a:r>
+          </a:p>
+        </p:txBody>
+      </p:sp>
+      <p:sp>
+        <p:nvSpPr>
+          <p:cNvPr id="6" name="TextBox 5"/>
+          <p:cNvSpPr txBox="1"/>
           <p:nvPr/>
         </p:nvSpPr>
         <p:spPr>
           <a:xfrm>
-            <a:off x="4389120" y="1828800"/>
-            <a:ext cx="3291840" cy="4389120"/>
-          </a:xfrm>
-          <a:prstGeom prst="roundRect">
-            <a:avLst/>
-          </a:prstGeom>
-          <a:solidFill>
-            <a:srgbClr val="F8FAFC"/>
-          </a:solidFill>
-          <a:ln w="19050">
-            <a:solidFill>
-              <a:srgbClr val="E2E8F0"/>
-            </a:solidFill>
-          </a:ln>
-        </p:spPr>
-        <p:style>
-          <a:lnRef idx="1">
-            <a:schemeClr val="accent1"/>
-          </a:lnRef>
-          <a:fillRef idx="3">
-            <a:schemeClr val="accent1"/>
-          </a:fillRef>
-          <a:effectRef idx="2">
-            <a:schemeClr val="accent1"/>
-          </a:effectRef>
-          <a:fontRef idx="minor">
-            <a:schemeClr val="lt1"/>
-          </a:fontRef>
-        </p:style>
-        <p:txBody>
-          <a:bodyPr rtlCol="0" anchor="ctr"/>
-          <a:lstStyle/>
-          <a:p>
-            <a:pPr algn="ctr"/>
-          </a:p>
-        </p:txBody>
-      </p:sp>
-      <p:sp>
-        <p:nvSpPr>
-          <p:cNvPr id="8" name="TextBox 7"/>
-          <p:cNvSpPr txBox="1"/>
-          <p:nvPr/>
-        </p:nvSpPr>
-        <p:spPr>
-          <a:xfrm>
-            <a:off x="4572000" y="1965960"/>
-            <a:ext cx="2926080" cy="4114800"/>
+            <a:off x="594360" y="6428232"/>
+            <a:ext cx="10972800" cy="228600"/>
           </a:xfrm>
           <a:prstGeom prst="rect">
             <a:avLst/>
@@ -4926,247 +4511,15 @@
               <a:spcAft>
                 <a:spcPts val="800"/>
               </a:spcAft>
-              <a:defRPr sz="1400" b="1">
-                <a:solidFill>
-                  <a:srgbClr val="0284C7"/>
-                </a:solidFill>
+              <a:defRPr sz="1000" b="0">
+                <a:solidFill>
+                  <a:srgbClr val="64748B"/>
+                </a:solidFill>
+                <a:latin typeface="Arial"/>
               </a:defRPr>
             </a:pPr>
             <a:r>
-              <a:t>2. Decision-Focused (DFL)</a:t>
-            </a:r>
-          </a:p>
-          <a:p>
-            <a:pPr>
-              <a:spcAft>
-                <a:spcPts val="400"/>
-              </a:spcAft>
-              <a:defRPr sz="1100">
-                <a:solidFill>
-                  <a:srgbClr val="1E293B"/>
-                </a:solidFill>
-              </a:defRPr>
-            </a:pPr>
-            <a:r>
-              <a:t>• Architecture: PyTorch PMF trained end-to-end via PyEPO SPO+ surrogate loss.</a:t>
-            </a:r>
-          </a:p>
-          <a:p>
-            <a:pPr>
-              <a:spcAft>
-                <a:spcPts val="400"/>
-              </a:spcAft>
-              <a:defRPr sz="1100">
-                <a:solidFill>
-                  <a:srgbClr val="1E293B"/>
-                </a:solidFill>
-              </a:defRPr>
-            </a:pPr>
-            <a:r>
-              <a:t>• Decision Aware: Model parameters update against realized MILP allocation regret.</a:t>
-            </a:r>
-          </a:p>
-          <a:p>
-            <a:pPr>
-              <a:spcAft>
-                <a:spcPts val="400"/>
-              </a:spcAft>
-              <a:defRPr sz="1100">
-                <a:solidFill>
-                  <a:srgbClr val="1E293B"/>
-                </a:solidFill>
-              </a:defRPr>
-            </a:pPr>
-            <a:r>
-              <a:t>• Marginal Focus: Focuses model capacity on critical k-th unit survival probabilities q[s,k].</a:t>
-            </a:r>
-          </a:p>
-          <a:p>
-            <a:pPr>
-              <a:spcAft>
-                <a:spcPts val="400"/>
-              </a:spcAft>
-              <a:defRPr sz="1100">
-                <a:solidFill>
-                  <a:srgbClr val="1E293B"/>
-                </a:solidFill>
-              </a:defRPr>
-            </a:pPr>
-            <a:r>
-              <a:t>• Identity Verified: Realized cost C(x,d) = C(0,d) + sum c_true[s,k] * y[s,k].</a:t>
-            </a:r>
-          </a:p>
-          <a:p>
-            <a:pPr>
-              <a:spcAft>
-                <a:spcPts val="400"/>
-              </a:spcAft>
-              <a:defRPr sz="1100">
-                <a:solidFill>
-                  <a:srgbClr val="1E293B"/>
-                </a:solidFill>
-              </a:defRPr>
-            </a:pPr>
-            <a:r>
-              <a:t>• Result: Directly cuts downstream allocation cost by 8%–18% without retraining.</a:t>
-            </a:r>
-          </a:p>
-        </p:txBody>
-      </p:sp>
-      <p:sp>
-        <p:nvSpPr>
-          <p:cNvPr id="9" name="Rounded Rectangle 8"/>
-          <p:cNvSpPr/>
-          <p:nvPr/>
-        </p:nvSpPr>
-        <p:spPr>
-          <a:xfrm>
-            <a:off x="8046720" y="1828800"/>
-            <a:ext cx="3383280" cy="4389120"/>
-          </a:xfrm>
-          <a:prstGeom prst="roundRect">
-            <a:avLst/>
-          </a:prstGeom>
-          <a:solidFill>
-            <a:srgbClr val="F8FAFC"/>
-          </a:solidFill>
-          <a:ln w="19050">
-            <a:solidFill>
-              <a:srgbClr val="E2E8F0"/>
-            </a:solidFill>
-          </a:ln>
-        </p:spPr>
-        <p:style>
-          <a:lnRef idx="1">
-            <a:schemeClr val="accent1"/>
-          </a:lnRef>
-          <a:fillRef idx="3">
-            <a:schemeClr val="accent1"/>
-          </a:fillRef>
-          <a:effectRef idx="2">
-            <a:schemeClr val="accent1"/>
-          </a:effectRef>
-          <a:fontRef idx="minor">
-            <a:schemeClr val="lt1"/>
-          </a:fontRef>
-        </p:style>
-        <p:txBody>
-          <a:bodyPr rtlCol="0" anchor="ctr"/>
-          <a:lstStyle/>
-          <a:p>
-            <a:pPr algn="ctr"/>
-          </a:p>
-        </p:txBody>
-      </p:sp>
-      <p:sp>
-        <p:nvSpPr>
-          <p:cNvPr id="10" name="TextBox 9"/>
-          <p:cNvSpPr txBox="1"/>
-          <p:nvPr/>
-        </p:nvSpPr>
-        <p:spPr>
-          <a:xfrm>
-            <a:off x="8229600" y="1965960"/>
-            <a:ext cx="3017520" cy="4114800"/>
-          </a:xfrm>
-          <a:prstGeom prst="rect">
-            <a:avLst/>
-          </a:prstGeom>
-          <a:noFill/>
-        </p:spPr>
-        <p:txBody>
-          <a:bodyPr wrap="square">
-            <a:spAutoFit/>
-          </a:bodyPr>
-          <a:lstStyle/>
-          <a:p>
-            <a:pPr>
-              <a:spcAft>
-                <a:spcPts val="800"/>
-              </a:spcAft>
-              <a:defRPr sz="1400" b="1">
-                <a:solidFill>
-                  <a:srgbClr val="10B981"/>
-                </a:solidFill>
-              </a:defRPr>
-            </a:pPr>
-            <a:r>
-              <a:t>3. Integrated DFL + DRO</a:t>
-            </a:r>
-          </a:p>
-          <a:p>
-            <a:pPr>
-              <a:spcAft>
-                <a:spcPts val="400"/>
-              </a:spcAft>
-              <a:defRPr sz="1100">
-                <a:solidFill>
-                  <a:srgbClr val="1E293B"/>
-                </a:solidFill>
-              </a:defRPr>
-            </a:pPr>
-            <a:r>
-              <a:t>• Architecture: DFL PMF -&gt; Empirical Copula -&gt; CVaR_alpha Ambiguity Set MILP.</a:t>
-            </a:r>
-          </a:p>
-          <a:p>
-            <a:pPr>
-              <a:spcAft>
-                <a:spcPts val="400"/>
-              </a:spcAft>
-              <a:defRPr sz="1100">
-                <a:solidFill>
-                  <a:srgbClr val="1E293B"/>
-                </a:solidFill>
-              </a:defRPr>
-            </a:pPr>
-            <a:r>
-              <a:t>• Ambiguity Set: P_alpha = {w: sum w = 1, 0 &lt;= w_j &lt;= p_j/(1-alpha)}.</a:t>
-            </a:r>
-          </a:p>
-          <a:p>
-            <a:pPr>
-              <a:spcAft>
-                <a:spcPts val="400"/>
-              </a:spcAft>
-              <a:defRPr sz="1100">
-                <a:solidFill>
-                  <a:srgbClr val="1E293B"/>
-                </a:solidFill>
-              </a:defRPr>
-            </a:pPr>
-            <a:r>
-              <a:t>• Mathematical Equivalence: Max expected loss over P_alpha equals exact CVaR_alpha.</a:t>
-            </a:r>
-          </a:p>
-          <a:p>
-            <a:pPr>
-              <a:spcAft>
-                <a:spcPts val="400"/>
-              </a:spcAft>
-              <a:defRPr sz="1100">
-                <a:solidFill>
-                  <a:srgbClr val="1E293B"/>
-                </a:solidFill>
-              </a:defRPr>
-            </a:pPr>
-            <a:r>
-              <a:t>• Correlated Risk: Preserves cross-store rank shocks via empirical copula.</a:t>
-            </a:r>
-          </a:p>
-          <a:p>
-            <a:pPr>
-              <a:spcAft>
-                <a:spcPts val="400"/>
-              </a:spcAft>
-              <a:defRPr sz="1100">
-                <a:solidFill>
-                  <a:srgbClr val="1E293B"/>
-                </a:solidFill>
-              </a:defRPr>
-            </a:pPr>
-            <a:r>
-              <a:t>• Result: Robustly hedges severe demand spikes, lowering worst-tail loss by up to 25 MU.</a:t>
+              <a:t>Synthetic MU economics | Corrected v2 experiments | 2/7</a:t>
             </a:r>
           </a:p>
         </p:txBody>
@@ -5197,8 +4550,8 @@
         </p:nvSpPr>
         <p:spPr>
           <a:xfrm>
-            <a:off x="731520" y="457200"/>
-            <a:ext cx="7315200" cy="274320"/>
+            <a:off x="594360" y="365760"/>
+            <a:ext cx="10972800" cy="274320"/>
           </a:xfrm>
           <a:prstGeom prst="rect">
             <a:avLst/>
@@ -5212,14 +4565,18 @@
           <a:lstStyle/>
           <a:p>
             <a:pPr>
-              <a:defRPr sz="1000" b="1">
-                <a:solidFill>
-                  <a:srgbClr val="D97706"/>
-                </a:solidFill>
+              <a:spcAft>
+                <a:spcPts val="800"/>
+              </a:spcAft>
+              <a:defRPr sz="1100" b="1">
+                <a:solidFill>
+                  <a:srgbClr val="0369A1"/>
+                </a:solidFill>
+                <a:latin typeface="Arial"/>
               </a:defRPr>
             </a:pPr>
             <a:r>
-              <a:t>MR.DIY DECISION INTELLIGENCE</a:t>
+              <a:t>DECISION INTELLIGENCE / INTERVIEW RESEARCH PROTOTYPE</a:t>
             </a:r>
           </a:p>
         </p:txBody>
@@ -5232,8 +4589,8 @@
         </p:nvSpPr>
         <p:spPr>
           <a:xfrm>
-            <a:off x="731520" y="731520"/>
-            <a:ext cx="10515600" cy="548640"/>
+            <a:off x="594360" y="822960"/>
+            <a:ext cx="10972800" cy="594360"/>
           </a:xfrm>
           <a:prstGeom prst="rect">
             <a:avLst/>
@@ -5247,14 +4604,18 @@
           <a:lstStyle/>
           <a:p>
             <a:pPr>
-              <a:defRPr sz="2200" b="1">
+              <a:spcAft>
+                <a:spcPts val="800"/>
+              </a:spcAft>
+              <a:defRPr sz="2800" b="1">
                 <a:solidFill>
                   <a:srgbClr val="0F172A"/>
                 </a:solidFill>
+                <a:latin typeface="Arial"/>
               </a:defRPr>
             </a:pPr>
             <a:r>
-              <a:t>Deep Dive: The Supply Rationing Regret Paradox</a:t>
+              <a:t>Learning and optimization answer different questions</a:t>
             </a:r>
           </a:p>
         </p:txBody>
@@ -5267,8 +4628,8 @@
         </p:nvSpPr>
         <p:spPr>
           <a:xfrm>
-            <a:off x="731520" y="1280160"/>
-            <a:ext cx="10515600" cy="365760"/>
+            <a:off x="594360" y="1508760"/>
+            <a:ext cx="10972800" cy="457200"/>
           </a:xfrm>
           <a:prstGeom prst="rect">
             <a:avLst/>
@@ -5282,14 +4643,18 @@
           <a:lstStyle/>
           <a:p>
             <a:pPr>
-              <a:defRPr sz="1200">
-                <a:solidFill>
-                  <a:srgbClr val="64748B"/>
-                </a:solidFill>
+              <a:spcAft>
+                <a:spcPts val="800"/>
+              </a:spcAft>
+              <a:defRPr sz="1500" b="0">
+                <a:solidFill>
+                  <a:srgbClr val="475569"/>
+                </a:solidFill>
+                <a:latin typeface="Arial"/>
               </a:defRPr>
             </a:pPr>
             <a:r>
-              <a:t>Why superior forecast accuracy fails in scarce retail networks—and how decision-focused gradients fix it.</a:t>
+              <a:t>A distribution feeds the decision; SPO+ supplies training feedback</a:t>
             </a:r>
           </a:p>
         </p:txBody>
@@ -5302,18 +4667,18 @@
         </p:nvSpPr>
         <p:spPr>
           <a:xfrm>
-            <a:off x="731520" y="1828800"/>
-            <a:ext cx="5120640" cy="4389120"/>
+            <a:off x="685800" y="2103120"/>
+            <a:ext cx="2377440" cy="822960"/>
           </a:xfrm>
           <a:prstGeom prst="roundRect">
             <a:avLst/>
           </a:prstGeom>
           <a:solidFill>
-            <a:srgbClr val="F8FAFC"/>
+            <a:srgbClr val="E0F2FE"/>
           </a:solidFill>
-          <a:ln w="19050">
+          <a:ln>
             <a:solidFill>
-              <a:srgbClr val="E2E8F0"/>
+              <a:srgbClr val="7DD3FC"/>
             </a:solidFill>
           </a:ln>
         </p:spPr>
@@ -5347,8 +4712,8 @@
         </p:nvSpPr>
         <p:spPr>
           <a:xfrm>
-            <a:off x="914400" y="1965960"/>
-            <a:ext cx="4754880" cy="4114800"/>
+            <a:off x="804672" y="2249424"/>
+            <a:ext cx="2139696" cy="594360"/>
           </a:xfrm>
           <a:prstGeom prst="rect">
             <a:avLst/>
@@ -5365,113 +4730,78 @@
               <a:spcAft>
                 <a:spcPts val="800"/>
               </a:spcAft>
-              <a:defRPr sz="1400" b="1">
-                <a:solidFill>
-                  <a:srgbClr val="D97706"/>
-                </a:solidFill>
+              <a:defRPr sz="1700" b="1">
+                <a:solidFill>
+                  <a:srgbClr val="0F172A"/>
+                </a:solidFill>
+                <a:latin typeface="Arial"/>
               </a:defRPr>
             </a:pPr>
             <a:r>
-              <a:t>The Finding: Forecast MAE vs. Decision Regret</a:t>
-            </a:r>
-          </a:p>
+              <a:t>Pre-origin features</a:t>
+            </a:r>
+          </a:p>
+        </p:txBody>
+      </p:sp>
+      <p:sp>
+        <p:nvSpPr>
+          <p:cNvPr id="7" name="TextBox 6"/>
+          <p:cNvSpPr txBox="1"/>
+          <p:nvPr/>
+        </p:nvSpPr>
+        <p:spPr>
+          <a:xfrm>
+            <a:off x="3136392" y="2286000"/>
+            <a:ext cx="365760" cy="457200"/>
+          </a:xfrm>
+          <a:prstGeom prst="rect">
+            <a:avLst/>
+          </a:prstGeom>
+          <a:noFill/>
+        </p:spPr>
+        <p:txBody>
+          <a:bodyPr wrap="square">
+            <a:spAutoFit/>
+          </a:bodyPr>
+          <a:lstStyle/>
           <a:p>
             <a:pPr>
               <a:spcAft>
-                <a:spcPts val="400"/>
+                <a:spcPts val="800"/>
               </a:spcAft>
-              <a:defRPr sz="1100">
-                <a:solidFill>
-                  <a:srgbClr val="1E293B"/>
-                </a:solidFill>
+              <a:defRPr sz="2200" b="0">
+                <a:solidFill>
+                  <a:srgbClr val="0369A1"/>
+                </a:solidFill>
+                <a:latin typeface="Arial"/>
               </a:defRPr>
             </a:pPr>
             <a:r>
-              <a:t>• Validation Ablation (HOUSEHOLD_1_055): Pure NLL (lambda_DFL=0) gives 17.59 MU regret (WAPE 28.5%); SPO+ (lambda_DFL=2.0) cuts regret by -25.9% to 13.04 MU.</a:t>
-            </a:r>
-          </a:p>
-          <a:p>
-            <a:pPr>
-              <a:spcAft>
-                <a:spcPts val="400"/>
-              </a:spcAft>
-              <a:defRPr sz="1100">
-                <a:solidFill>
-                  <a:srgbClr val="1E293B"/>
-                </a:solidFill>
-              </a:defRPr>
-            </a:pPr>
-            <a:r>
-              <a:t>• Out-of-Sample Carryover (L=0 on M5): dfl_dro achieves 19.4% lower cost (1230.94 vs 1526.37 MU) and 55.0% lower regret (242.18 vs 537.60 MU) than supervised_pto.</a:t>
-            </a:r>
-          </a:p>
-          <a:p>
-            <a:pPr>
-              <a:spcAft>
-                <a:spcPts val="400"/>
-              </a:spcAft>
-              <a:defRPr sz="1100">
-                <a:solidFill>
-                  <a:srgbClr val="1E293B"/>
-                </a:solidFill>
-              </a:defRPr>
-            </a:pPr>
-            <a:r>
-              <a:t>• The Mechanism: Symmetric loss functions waste model capacity fitting bulk mean demand rather than binding allocation cutoffs.</a:t>
-            </a:r>
-          </a:p>
-          <a:p>
-            <a:pPr>
-              <a:spcAft>
-                <a:spcPts val="400"/>
-              </a:spcAft>
-              <a:defRPr sz="1100">
-                <a:solidFill>
-                  <a:srgbClr val="1E293B"/>
-                </a:solidFill>
-              </a:defRPr>
-            </a:pPr>
-            <a:r>
-              <a:t>• In contrast, the allocation solver only cares whether demand exceeds current stock plus allocation: D &gt;= I_s + k.</a:t>
-            </a:r>
-          </a:p>
-          <a:p>
-            <a:pPr>
-              <a:spcAft>
-                <a:spcPts val="400"/>
-              </a:spcAft>
-              <a:defRPr sz="1100">
-                <a:solidFill>
-                  <a:srgbClr val="1E293B"/>
-                </a:solidFill>
-              </a:defRPr>
-            </a:pPr>
-            <a:r>
-              <a:t>• Result: Decision-aware training directly targets the store-SKU margin where scarce supply is rationed.</a:t>
-            </a:r>
-          </a:p>
-        </p:txBody>
-      </p:sp>
-      <p:sp>
-        <p:nvSpPr>
-          <p:cNvPr id="7" name="Rounded Rectangle 6"/>
+              <a:t>→</a:t>
+            </a:r>
+          </a:p>
+        </p:txBody>
+      </p:sp>
+      <p:sp>
+        <p:nvSpPr>
+          <p:cNvPr id="8" name="Rounded Rectangle 7"/>
           <p:cNvSpPr/>
           <p:nvPr/>
         </p:nvSpPr>
         <p:spPr>
           <a:xfrm>
-            <a:off x="6217920" y="1828800"/>
-            <a:ext cx="5212080" cy="4389120"/>
+            <a:off x="3520440" y="2103120"/>
+            <a:ext cx="2377440" cy="822960"/>
           </a:xfrm>
           <a:prstGeom prst="roundRect">
             <a:avLst/>
           </a:prstGeom>
           <a:solidFill>
-            <a:srgbClr val="F8FAFC"/>
+            <a:srgbClr val="E0F2FE"/>
           </a:solidFill>
-          <a:ln w="19050">
+          <a:ln>
             <a:solidFill>
-              <a:srgbClr val="E2E8F0"/>
+              <a:srgbClr val="7DD3FC"/>
             </a:solidFill>
           </a:ln>
         </p:spPr>
@@ -5499,14 +4829,14 @@
       </p:sp>
       <p:sp>
         <p:nvSpPr>
-          <p:cNvPr id="8" name="TextBox 7"/>
+          <p:cNvPr id="9" name="TextBox 8"/>
           <p:cNvSpPr txBox="1"/>
           <p:nvPr/>
         </p:nvSpPr>
         <p:spPr>
           <a:xfrm>
-            <a:off x="6400800" y="1965960"/>
-            <a:ext cx="4846320" cy="4114800"/>
+            <a:off x="3639312" y="2249424"/>
+            <a:ext cx="2139696" cy="594360"/>
           </a:xfrm>
           <a:prstGeom prst="rect">
             <a:avLst/>
@@ -5523,89 +4853,410 @@
               <a:spcAft>
                 <a:spcPts val="800"/>
               </a:spcAft>
-              <a:defRPr sz="1400" b="1">
-                <a:solidFill>
-                  <a:srgbClr val="0284C7"/>
-                </a:solidFill>
+              <a:defRPr sz="1700" b="1">
+                <a:solidFill>
+                  <a:srgbClr val="0F172A"/>
+                </a:solidFill>
+                <a:latin typeface="Arial"/>
               </a:defRPr>
             </a:pPr>
             <a:r>
-              <a:t>Mathematical Mechanism: Marginal Cost Alignment</a:t>
-            </a:r>
-          </a:p>
+              <a:t>Calibrated demand PMF</a:t>
+            </a:r>
+          </a:p>
+        </p:txBody>
+      </p:sp>
+      <p:sp>
+        <p:nvSpPr>
+          <p:cNvPr id="10" name="TextBox 9"/>
+          <p:cNvSpPr txBox="1"/>
+          <p:nvPr/>
+        </p:nvSpPr>
+        <p:spPr>
+          <a:xfrm>
+            <a:off x="5971032" y="2286000"/>
+            <a:ext cx="365760" cy="457200"/>
+          </a:xfrm>
+          <a:prstGeom prst="rect">
+            <a:avLst/>
+          </a:prstGeom>
+          <a:noFill/>
+        </p:spPr>
+        <p:txBody>
+          <a:bodyPr wrap="square">
+            <a:spAutoFit/>
+          </a:bodyPr>
+          <a:lstStyle/>
           <a:p>
             <a:pPr>
               <a:spcAft>
-                <a:spcPts val="400"/>
+                <a:spcPts val="800"/>
               </a:spcAft>
-              <a:defRPr sz="1100">
-                <a:solidFill>
-                  <a:srgbClr val="1E293B"/>
-                </a:solidFill>
+              <a:defRPr sz="2200" b="0">
+                <a:solidFill>
+                  <a:srgbClr val="0369A1"/>
+                </a:solidFill>
+                <a:latin typeface="Arial"/>
               </a:defRPr>
             </a:pPr>
             <a:r>
-              <a:t>• Marginal Survival Identity: c_hat[s,k] = t_s + h_s - (b_s + h_s) * P(D_s &gt;= I_s + k).</a:t>
-            </a:r>
-          </a:p>
+              <a:t>→</a:t>
+            </a:r>
+          </a:p>
+        </p:txBody>
+      </p:sp>
+      <p:sp>
+        <p:nvSpPr>
+          <p:cNvPr id="11" name="Rounded Rectangle 10"/>
+          <p:cNvSpPr/>
+          <p:nvPr/>
+        </p:nvSpPr>
+        <p:spPr>
+          <a:xfrm>
+            <a:off x="6355080" y="2103120"/>
+            <a:ext cx="2377440" cy="822960"/>
+          </a:xfrm>
+          <a:prstGeom prst="roundRect">
+            <a:avLst/>
+          </a:prstGeom>
+          <a:solidFill>
+            <a:srgbClr val="E0F2FE"/>
+          </a:solidFill>
+          <a:ln>
+            <a:solidFill>
+              <a:srgbClr val="7DD3FC"/>
+            </a:solidFill>
+          </a:ln>
+        </p:spPr>
+        <p:style>
+          <a:lnRef idx="1">
+            <a:schemeClr val="accent1"/>
+          </a:lnRef>
+          <a:fillRef idx="3">
+            <a:schemeClr val="accent1"/>
+          </a:fillRef>
+          <a:effectRef idx="2">
+            <a:schemeClr val="accent1"/>
+          </a:effectRef>
+          <a:fontRef idx="minor">
+            <a:schemeClr val="lt1"/>
+          </a:fontRef>
+        </p:style>
+        <p:txBody>
+          <a:bodyPr rtlCol="0" anchor="ctr"/>
+          <a:lstStyle/>
+          <a:p>
+            <a:pPr algn="ctr"/>
+          </a:p>
+        </p:txBody>
+      </p:sp>
+      <p:sp>
+        <p:nvSpPr>
+          <p:cNvPr id="12" name="TextBox 11"/>
+          <p:cNvSpPr txBox="1"/>
+          <p:nvPr/>
+        </p:nvSpPr>
+        <p:spPr>
+          <a:xfrm>
+            <a:off x="6473952" y="2249424"/>
+            <a:ext cx="2139696" cy="594360"/>
+          </a:xfrm>
+          <a:prstGeom prst="rect">
+            <a:avLst/>
+          </a:prstGeom>
+          <a:noFill/>
+        </p:spPr>
+        <p:txBody>
+          <a:bodyPr wrap="square">
+            <a:spAutoFit/>
+          </a:bodyPr>
+          <a:lstStyle/>
           <a:p>
             <a:pPr>
               <a:spcAft>
-                <a:spcPts val="400"/>
+                <a:spcPts val="800"/>
               </a:spcAft>
-              <a:defRPr sz="1100">
-                <a:solidFill>
-                  <a:srgbClr val="1E293B"/>
-                </a:solidFill>
+              <a:defRPr sz="1700" b="1">
+                <a:solidFill>
+                  <a:srgbClr val="0F172A"/>
+                </a:solidFill>
+                <a:latin typeface="Arial"/>
               </a:defRPr>
             </a:pPr>
             <a:r>
-              <a:t>• SPO+ Surrogate Loss: L_SPO+(c_hat, c_true) = max_w {(c_true - 2 c_hat)^T w} + 2 c_hat^T w* - c_true^T w*.</a:t>
-            </a:r>
-          </a:p>
+              <a:t>Marginal costs / joint scenarios</a:t>
+            </a:r>
+          </a:p>
+        </p:txBody>
+      </p:sp>
+      <p:sp>
+        <p:nvSpPr>
+          <p:cNvPr id="13" name="TextBox 12"/>
+          <p:cNvSpPr txBox="1"/>
+          <p:nvPr/>
+        </p:nvSpPr>
+        <p:spPr>
+          <a:xfrm>
+            <a:off x="8805672" y="2286000"/>
+            <a:ext cx="365760" cy="457200"/>
+          </a:xfrm>
+          <a:prstGeom prst="rect">
+            <a:avLst/>
+          </a:prstGeom>
+          <a:noFill/>
+        </p:spPr>
+        <p:txBody>
+          <a:bodyPr wrap="square">
+            <a:spAutoFit/>
+          </a:bodyPr>
+          <a:lstStyle/>
           <a:p>
             <a:pPr>
               <a:spcAft>
-                <a:spcPts val="400"/>
+                <a:spcPts val="800"/>
               </a:spcAft>
-              <a:defRPr sz="1100">
-                <a:solidFill>
-                  <a:srgbClr val="1E293B"/>
-                </a:solidFill>
+              <a:defRPr sz="2200" b="0">
+                <a:solidFill>
+                  <a:srgbClr val="0369A1"/>
+                </a:solidFill>
+                <a:latin typeface="Arial"/>
               </a:defRPr>
             </a:pPr>
             <a:r>
-              <a:t>• Non-Zero Gradient Condition: Gradients flow ONLY through marginal unit thresholds that alter the active basis.</a:t>
-            </a:r>
-          </a:p>
+              <a:t>→</a:t>
+            </a:r>
+          </a:p>
+        </p:txBody>
+      </p:sp>
+      <p:sp>
+        <p:nvSpPr>
+          <p:cNvPr id="14" name="Rounded Rectangle 13"/>
+          <p:cNvSpPr/>
+          <p:nvPr/>
+        </p:nvSpPr>
+        <p:spPr>
+          <a:xfrm>
+            <a:off x="9189720" y="2103120"/>
+            <a:ext cx="2377440" cy="822960"/>
+          </a:xfrm>
+          <a:prstGeom prst="roundRect">
+            <a:avLst/>
+          </a:prstGeom>
+          <a:solidFill>
+            <a:srgbClr val="E0F2FE"/>
+          </a:solidFill>
+          <a:ln>
+            <a:solidFill>
+              <a:srgbClr val="7DD3FC"/>
+            </a:solidFill>
+          </a:ln>
+        </p:spPr>
+        <p:style>
+          <a:lnRef idx="1">
+            <a:schemeClr val="accent1"/>
+          </a:lnRef>
+          <a:fillRef idx="3">
+            <a:schemeClr val="accent1"/>
+          </a:fillRef>
+          <a:effectRef idx="2">
+            <a:schemeClr val="accent1"/>
+          </a:effectRef>
+          <a:fontRef idx="minor">
+            <a:schemeClr val="lt1"/>
+          </a:fontRef>
+        </p:style>
+        <p:txBody>
+          <a:bodyPr rtlCol="0" anchor="ctr"/>
+          <a:lstStyle/>
+          <a:p>
+            <a:pPr algn="ctr"/>
+          </a:p>
+        </p:txBody>
+      </p:sp>
+      <p:sp>
+        <p:nvSpPr>
+          <p:cNvPr id="15" name="TextBox 14"/>
+          <p:cNvSpPr txBox="1"/>
+          <p:nvPr/>
+        </p:nvSpPr>
+        <p:spPr>
+          <a:xfrm>
+            <a:off x="9308592" y="2249424"/>
+            <a:ext cx="2139696" cy="594360"/>
+          </a:xfrm>
+          <a:prstGeom prst="rect">
+            <a:avLst/>
+          </a:prstGeom>
+          <a:noFill/>
+        </p:spPr>
+        <p:txBody>
+          <a:bodyPr wrap="square">
+            <a:spAutoFit/>
+          </a:bodyPr>
+          <a:lstStyle/>
           <a:p>
             <a:pPr>
               <a:spcAft>
-                <a:spcPts val="400"/>
+                <a:spcPts val="800"/>
               </a:spcAft>
-              <a:defRPr sz="1100">
-                <a:solidFill>
-                  <a:srgbClr val="1E293B"/>
-                </a:solidFill>
+              <a:defRPr sz="1700" b="1">
+                <a:solidFill>
+                  <a:srgbClr val="0F172A"/>
+                </a:solidFill>
+                <a:latin typeface="Arial"/>
               </a:defRPr>
             </a:pPr>
             <a:r>
-              <a:t>• Subgradient Smoke Test: Verified finite, non-zero gradients (grad norm = 7.7972 / 0.1419) updating weights toward optimal basis.</a:t>
-            </a:r>
-          </a:p>
+              <a:t>Integer allocation</a:t>
+            </a:r>
+          </a:p>
+        </p:txBody>
+      </p:sp>
+      <p:sp>
+        <p:nvSpPr>
+          <p:cNvPr id="16" name="TextBox 15"/>
+          <p:cNvSpPr txBox="1"/>
+          <p:nvPr/>
+        </p:nvSpPr>
+        <p:spPr>
+          <a:xfrm>
+            <a:off x="685800" y="3154680"/>
+            <a:ext cx="10835640" cy="502920"/>
+          </a:xfrm>
+          <a:prstGeom prst="rect">
+            <a:avLst/>
+          </a:prstGeom>
+          <a:noFill/>
+        </p:spPr>
+        <p:txBody>
+          <a:bodyPr wrap="square">
+            <a:spAutoFit/>
+          </a:bodyPr>
+          <a:lstStyle/>
           <a:p>
             <a:pPr>
               <a:spcAft>
-                <a:spcPts val="400"/>
+                <a:spcPts val="800"/>
               </a:spcAft>
-              <a:defRPr sz="1100">
+              <a:defRPr sz="1600" b="0">
+                <a:solidFill>
+                  <a:srgbClr val="0369A1"/>
+                </a:solidFill>
+                <a:latin typeface="Arial"/>
+              </a:defRPr>
+            </a:pPr>
+            <a:r>
+              <a:t>Training feedback: SPO+ updates the PMF through a fixed feasible optimization template.</a:t>
+            </a:r>
+          </a:p>
+        </p:txBody>
+      </p:sp>
+      <p:sp>
+        <p:nvSpPr>
+          <p:cNvPr id="17" name="TextBox 16"/>
+          <p:cNvSpPr txBox="1"/>
+          <p:nvPr/>
+        </p:nvSpPr>
+        <p:spPr>
+          <a:xfrm>
+            <a:off x="685800" y="3840480"/>
+            <a:ext cx="10835640" cy="2514600"/>
+          </a:xfrm>
+          <a:prstGeom prst="rect">
+            <a:avLst/>
+          </a:prstGeom>
+          <a:noFill/>
+        </p:spPr>
+        <p:txBody>
+          <a:bodyPr wrap="square">
+            <a:spAutoFit/>
+          </a:bodyPr>
+          <a:lstStyle/>
+          <a:p>
+            <a:pPr>
+              <a:spcAft>
+                <a:spcPts val="800"/>
+              </a:spcAft>
+              <a:defRPr sz="1900" b="0">
                 <a:solidFill>
                   <a:srgbClr val="1E293B"/>
                 </a:solidFill>
+                <a:latin typeface="Arial"/>
               </a:defRPr>
             </a:pPr>
             <a:r>
-              <a:t>• Hybrid Loss Balance: L_total = L_NLL + lambda_DFL * L_SPO+ guarantees both distribution calibration and decision optimality.</a:t>
+              <a:t>• Matched learning: the same architecture, initialization, batches and budget; DFL adds normalized SPO+.</a:t>
+            </a:r>
+          </a:p>
+          <a:p>
+            <a:pPr>
+              <a:spcAft>
+                <a:spcPts val="800"/>
+              </a:spcAft>
+              <a:defRPr sz="1900" b="0">
+                <a:solidFill>
+                  <a:srgbClr val="1E293B"/>
+                </a:solidFill>
+                <a:latin typeface="Arial"/>
+              </a:defRPr>
+            </a:pPr>
+            <a:r>
+              <a:t>• Probability-reweighting DRO: sum(w)=1 and 0 &lt;= w[j] &lt;= p[j]/(1-alpha). Its worst expected loss equals CVaR.</a:t>
+            </a:r>
+          </a:p>
+          <a:p>
+            <a:pPr>
+              <a:spcAft>
+                <a:spcPts val="800"/>
+              </a:spcAft>
+              <a:defRPr sz="1900" b="0">
+                <a:solidFill>
+                  <a:srgbClr val="1E293B"/>
+                </a:solidFill>
+                <a:latin typeface="Arial"/>
+              </a:defRPr>
+            </a:pPr>
+            <a:r>
+              <a:t>• Risk-neutral scenario ablations isolate sampling from risk aversion; weight zero is expected-cost optimization.</a:t>
+            </a:r>
+          </a:p>
+        </p:txBody>
+      </p:sp>
+      <p:sp>
+        <p:nvSpPr>
+          <p:cNvPr id="18" name="TextBox 17"/>
+          <p:cNvSpPr txBox="1"/>
+          <p:nvPr/>
+        </p:nvSpPr>
+        <p:spPr>
+          <a:xfrm>
+            <a:off x="594360" y="6428232"/>
+            <a:ext cx="10972800" cy="228600"/>
+          </a:xfrm>
+          <a:prstGeom prst="rect">
+            <a:avLst/>
+          </a:prstGeom>
+          <a:noFill/>
+        </p:spPr>
+        <p:txBody>
+          <a:bodyPr wrap="square">
+            <a:spAutoFit/>
+          </a:bodyPr>
+          <a:lstStyle/>
+          <a:p>
+            <a:pPr>
+              <a:spcAft>
+                <a:spcPts val="800"/>
+              </a:spcAft>
+              <a:defRPr sz="1000" b="0">
+                <a:solidFill>
+                  <a:srgbClr val="64748B"/>
+                </a:solidFill>
+                <a:latin typeface="Arial"/>
+              </a:defRPr>
+            </a:pPr>
+            <a:r>
+              <a:t>Synthetic MU economics | Corrected v2 experiments | 3/7</a:t>
             </a:r>
           </a:p>
         </p:txBody>
@@ -5636,8 +5287,8 @@
         </p:nvSpPr>
         <p:spPr>
           <a:xfrm>
-            <a:off x="731520" y="457200"/>
-            <a:ext cx="7315200" cy="274320"/>
+            <a:off x="594360" y="365760"/>
+            <a:ext cx="10972800" cy="274320"/>
           </a:xfrm>
           <a:prstGeom prst="rect">
             <a:avLst/>
@@ -5651,14 +5302,18 @@
           <a:lstStyle/>
           <a:p>
             <a:pPr>
-              <a:defRPr sz="1000" b="1">
-                <a:solidFill>
-                  <a:srgbClr val="D97706"/>
-                </a:solidFill>
+              <a:spcAft>
+                <a:spcPts val="800"/>
+              </a:spcAft>
+              <a:defRPr sz="1100" b="1">
+                <a:solidFill>
+                  <a:srgbClr val="0369A1"/>
+                </a:solidFill>
+                <a:latin typeface="Arial"/>
               </a:defRPr>
             </a:pPr>
             <a:r>
-              <a:t>MR.DIY DECISION INTELLIGENCE</a:t>
+              <a:t>DECISION INTELLIGENCE / INTERVIEW RESEARCH PROTOTYPE</a:t>
             </a:r>
           </a:p>
         </p:txBody>
@@ -5671,8 +5326,8 @@
         </p:nvSpPr>
         <p:spPr>
           <a:xfrm>
-            <a:off x="731520" y="731520"/>
-            <a:ext cx="10515600" cy="548640"/>
+            <a:off x="594360" y="822960"/>
+            <a:ext cx="10972800" cy="594360"/>
           </a:xfrm>
           <a:prstGeom prst="rect">
             <a:avLst/>
@@ -5686,14 +5341,18 @@
           <a:lstStyle/>
           <a:p>
             <a:pPr>
-              <a:defRPr sz="2200" b="1">
+              <a:spcAft>
+                <a:spcPts val="800"/>
+              </a:spcAft>
+              <a:defRPr sz="2800" b="1">
                 <a:solidFill>
                   <a:srgbClr val="0F172A"/>
                 </a:solidFill>
+                <a:latin typeface="Arial"/>
               </a:defRPr>
             </a:pPr>
             <a:r>
-              <a:t>Retail Decision Policy Matrix for Category Managers</a:t>
+              <a:t>Test the decision, not only the forecast</a:t>
             </a:r>
           </a:p>
         </p:txBody>
@@ -5706,8 +5365,8 @@
         </p:nvSpPr>
         <p:spPr>
           <a:xfrm>
-            <a:off x="731520" y="1280160"/>
-            <a:ext cx="10515600" cy="365760"/>
+            <a:off x="594360" y="1508760"/>
+            <a:ext cx="10972800" cy="457200"/>
           </a:xfrm>
           <a:prstGeom prst="rect">
             <a:avLst/>
@@ -5721,73 +5380,32 @@
           <a:lstStyle/>
           <a:p>
             <a:pPr>
-              <a:defRPr sz="1200">
-                <a:solidFill>
-                  <a:srgbClr val="64748B"/>
-                </a:solidFill>
+              <a:spcAft>
+                <a:spcPts val="800"/>
+              </a:spcAft>
+              <a:defRPr sz="1500" b="0">
+                <a:solidFill>
+                  <a:srgbClr val="475569"/>
+                </a:solidFill>
+                <a:latin typeface="Arial"/>
               </a:defRPr>
             </a:pPr>
             <a:r>
-              <a:t>Rule-based dispatch framework translating empirical optimization benchmarks into operational guidelines.</a:t>
-            </a:r>
-          </a:p>
-        </p:txBody>
-      </p:sp>
-      <p:sp>
-        <p:nvSpPr>
-          <p:cNvPr id="5" name="Rounded Rectangle 4"/>
-          <p:cNvSpPr/>
+              <a:t>Shared conditions and independent mathematical checks</a:t>
+            </a:r>
+          </a:p>
+        </p:txBody>
+      </p:sp>
+      <p:sp>
+        <p:nvSpPr>
+          <p:cNvPr id="5" name="TextBox 4"/>
+          <p:cNvSpPr txBox="1"/>
           <p:nvPr/>
         </p:nvSpPr>
         <p:spPr>
           <a:xfrm>
-            <a:off x="731520" y="1828800"/>
-            <a:ext cx="5120640" cy="2103120"/>
-          </a:xfrm>
-          <a:prstGeom prst="roundRect">
-            <a:avLst/>
-          </a:prstGeom>
-          <a:solidFill>
-            <a:srgbClr val="F8FAFC"/>
-          </a:solidFill>
-          <a:ln w="19050">
-            <a:solidFill>
-              <a:srgbClr val="E2E8F0"/>
-            </a:solidFill>
-          </a:ln>
-        </p:spPr>
-        <p:style>
-          <a:lnRef idx="1">
-            <a:schemeClr val="accent1"/>
-          </a:lnRef>
-          <a:fillRef idx="3">
-            <a:schemeClr val="accent1"/>
-          </a:fillRef>
-          <a:effectRef idx="2">
-            <a:schemeClr val="accent1"/>
-          </a:effectRef>
-          <a:fontRef idx="minor">
-            <a:schemeClr val="lt1"/>
-          </a:fontRef>
-        </p:style>
-        <p:txBody>
-          <a:bodyPr rtlCol="0" anchor="ctr"/>
-          <a:lstStyle/>
-          <a:p>
-            <a:pPr algn="ctr"/>
-          </a:p>
-        </p:txBody>
-      </p:sp>
-      <p:sp>
-        <p:nvSpPr>
-          <p:cNvPr id="6" name="TextBox 5"/>
-          <p:cNvSpPr txBox="1"/>
-          <p:nvPr/>
-        </p:nvSpPr>
-        <p:spPr>
-          <a:xfrm>
-            <a:off x="914400" y="1965960"/>
-            <a:ext cx="4754880" cy="1828800"/>
+            <a:off x="685800" y="2148840"/>
+            <a:ext cx="10835640" cy="4206240"/>
           </a:xfrm>
           <a:prstGeom prst="rect">
             <a:avLst/>
@@ -5804,118 +5422,93 @@
               <a:spcAft>
                 <a:spcPts val="800"/>
               </a:spcAft>
-              <a:defRPr sz="1400" b="1">
-                <a:solidFill>
-                  <a:srgbClr val="10B981"/>
-                </a:solidFill>
+              <a:defRPr sz="1900" b="0">
+                <a:solidFill>
+                  <a:srgbClr val="1E293B"/>
+                </a:solidFill>
+                <a:latin typeface="Arial"/>
               </a:defRPr>
             </a:pPr>
             <a:r>
-              <a:t>Regime A: Fast-Moving &amp; Scarce Supply</a:t>
+              <a:t>• Seven required policies plus two diagnostic ablations use the same origin, stock, supply, capacity and realized target.</a:t>
             </a:r>
           </a:p>
           <a:p>
             <a:pPr>
               <a:spcAft>
-                <a:spcPts val="400"/>
+                <a:spcPts val="800"/>
               </a:spcAft>
-              <a:defRPr sz="1100">
+              <a:defRPr sz="1900" b="0">
                 <a:solidFill>
                   <a:srgbClr val="1E293B"/>
                 </a:solidFill>
+                <a:latin typeface="Arial"/>
               </a:defRPr>
             </a:pPr>
             <a:r>
-              <a:t>• Condition: Regular Household FMCG, W &lt; 0.70 sum D, Shortage penalty b/h &gt;= 8:1.</a:t>
+              <a:t>• Primary outcomes: held-out cost, hindsight regret and fill rate; forecast error is a diagnostic.</a:t>
             </a:r>
           </a:p>
           <a:p>
             <a:pPr>
               <a:spcAft>
-                <a:spcPts val="400"/>
+                <a:spcPts val="800"/>
               </a:spcAft>
-              <a:defRPr sz="1100">
+              <a:defRPr sz="1900" b="0">
                 <a:solidFill>
                   <a:srgbClr val="1E293B"/>
                 </a:solidFill>
+                <a:latin typeface="Arial"/>
               </a:defRPr>
             </a:pPr>
             <a:r>
-              <a:t>• Policy: dfl_dro (Integrated DFL + Scenario DRO).</a:t>
+              <a:t>• Three independent seeds use equal budgets and their own validation calibration and risk selection.</a:t>
             </a:r>
           </a:p>
           <a:p>
             <a:pPr>
               <a:spcAft>
-                <a:spcPts val="400"/>
+                <a:spcPts val="800"/>
               </a:spcAft>
-              <a:defRPr sz="1100">
+              <a:defRPr sz="1900" b="0">
                 <a:solidFill>
                   <a:srgbClr val="1E293B"/>
                 </a:solidFill>
+                <a:latin typeface="Arial"/>
               </a:defRPr>
             </a:pPr>
             <a:r>
-              <a:t>• Impact: 15%–35% cost reduction; buffers correlated regional store surges.</a:t>
-            </a:r>
-          </a:p>
-        </p:txBody>
-      </p:sp>
-      <p:sp>
-        <p:nvSpPr>
-          <p:cNvPr id="7" name="Rounded Rectangle 6"/>
-          <p:cNvSpPr/>
+              <a:t>• Paired moving-block intervals resample time origins. Small samples and few tail weeks limit certainty.</a:t>
+            </a:r>
+          </a:p>
+          <a:p>
+            <a:pPr>
+              <a:spcAft>
+                <a:spcPts val="800"/>
+              </a:spcAft>
+              <a:defRPr sz="1900" b="0">
+                <a:solidFill>
+                  <a:srgbClr val="1E293B"/>
+                </a:solidFill>
+                <a:latin typeface="Arial"/>
+              </a:defRPr>
+            </a:pPr>
+            <a:r>
+              <a:t>• Carryover extension: explicit dispatch, admissions and deferred inventory; the hindsight MILP is replayed and tested against exhaustive tiny cases.</a:t>
+            </a:r>
+          </a:p>
+        </p:txBody>
+      </p:sp>
+      <p:sp>
+        <p:nvSpPr>
+          <p:cNvPr id="6" name="TextBox 5"/>
+          <p:cNvSpPr txBox="1"/>
           <p:nvPr/>
         </p:nvSpPr>
         <p:spPr>
           <a:xfrm>
-            <a:off x="6217920" y="1828800"/>
-            <a:ext cx="5212080" cy="2103120"/>
-          </a:xfrm>
-          <a:prstGeom prst="roundRect">
-            <a:avLst/>
-          </a:prstGeom>
-          <a:solidFill>
-            <a:srgbClr val="F8FAFC"/>
-          </a:solidFill>
-          <a:ln w="19050">
-            <a:solidFill>
-              <a:srgbClr val="E2E8F0"/>
-            </a:solidFill>
-          </a:ln>
-        </p:spPr>
-        <p:style>
-          <a:lnRef idx="1">
-            <a:schemeClr val="accent1"/>
-          </a:lnRef>
-          <a:fillRef idx="3">
-            <a:schemeClr val="accent1"/>
-          </a:fillRef>
-          <a:effectRef idx="2">
-            <a:schemeClr val="accent1"/>
-          </a:effectRef>
-          <a:fontRef idx="minor">
-            <a:schemeClr val="lt1"/>
-          </a:fontRef>
-        </p:style>
-        <p:txBody>
-          <a:bodyPr rtlCol="0" anchor="ctr"/>
-          <a:lstStyle/>
-          <a:p>
-            <a:pPr algn="ctr"/>
-          </a:p>
-        </p:txBody>
-      </p:sp>
-      <p:sp>
-        <p:nvSpPr>
-          <p:cNvPr id="8" name="TextBox 7"/>
-          <p:cNvSpPr txBox="1"/>
-          <p:nvPr/>
-        </p:nvSpPr>
-        <p:spPr>
-          <a:xfrm>
-            <a:off x="6400800" y="1965960"/>
-            <a:ext cx="4846320" cy="1828800"/>
+            <a:off x="594360" y="6428232"/>
+            <a:ext cx="10972800" cy="228600"/>
           </a:xfrm>
           <a:prstGeom prst="rect">
             <a:avLst/>
@@ -5932,315 +5525,15 @@
               <a:spcAft>
                 <a:spcPts val="800"/>
               </a:spcAft>
-              <a:defRPr sz="1400" b="1">
-                <a:solidFill>
-                  <a:srgbClr val="0284C7"/>
-                </a:solidFill>
+              <a:defRPr sz="1000" b="0">
+                <a:solidFill>
+                  <a:srgbClr val="64748B"/>
+                </a:solidFill>
+                <a:latin typeface="Arial"/>
               </a:defRPr>
             </a:pPr>
             <a:r>
-              <a:t>Regime B: Intermittent / Lumpy Hardware</a:t>
-            </a:r>
-          </a:p>
-          <a:p>
-            <a:pPr>
-              <a:spcAft>
-                <a:spcPts val="400"/>
-              </a:spcAft>
-              <a:defRPr sz="1100">
-                <a:solidFill>
-                  <a:srgbClr val="1E293B"/>
-                </a:solidFill>
-              </a:defRPr>
-            </a:pPr>
-            <a:r>
-              <a:t>• Condition: Slow-moving DIY tools/fasteners, sporadic demand spikes.</a:t>
-            </a:r>
-          </a:p>
-          <a:p>
-            <a:pPr>
-              <a:spcAft>
-                <a:spcPts val="400"/>
-              </a:spcAft>
-              <a:defRPr sz="1100">
-                <a:solidFill>
-                  <a:srgbClr val="1E293B"/>
-                </a:solidFill>
-              </a:defRPr>
-            </a:pPr>
-            <a:r>
-              <a:t>• Policy: supervised_dro (Zero-Inflated PMF + DRO).</a:t>
-            </a:r>
-          </a:p>
-          <a:p>
-            <a:pPr>
-              <a:spcAft>
-                <a:spcPts val="400"/>
-              </a:spcAft>
-              <a:defRPr sz="1100">
-                <a:solidFill>
-                  <a:srgbClr val="1E293B"/>
-                </a:solidFill>
-              </a:defRPr>
-            </a:pPr>
-            <a:r>
-              <a:t>• Impact: 12%–28% lower tail risk; avoids noisy DFL gradients on zero-demand weeks.</a:t>
-            </a:r>
-          </a:p>
-        </p:txBody>
-      </p:sp>
-      <p:sp>
-        <p:nvSpPr>
-          <p:cNvPr id="9" name="Rounded Rectangle 8"/>
-          <p:cNvSpPr/>
-          <p:nvPr/>
-        </p:nvSpPr>
-        <p:spPr>
-          <a:xfrm>
-            <a:off x="731520" y="4114800"/>
-            <a:ext cx="5120640" cy="2103120"/>
-          </a:xfrm>
-          <a:prstGeom prst="roundRect">
-            <a:avLst/>
-          </a:prstGeom>
-          <a:solidFill>
-            <a:srgbClr val="F8FAFC"/>
-          </a:solidFill>
-          <a:ln w="19050">
-            <a:solidFill>
-              <a:srgbClr val="E2E8F0"/>
-            </a:solidFill>
-          </a:ln>
-        </p:spPr>
-        <p:style>
-          <a:lnRef idx="1">
-            <a:schemeClr val="accent1"/>
-          </a:lnRef>
-          <a:fillRef idx="3">
-            <a:schemeClr val="accent1"/>
-          </a:fillRef>
-          <a:effectRef idx="2">
-            <a:schemeClr val="accent1"/>
-          </a:effectRef>
-          <a:fontRef idx="minor">
-            <a:schemeClr val="lt1"/>
-          </a:fontRef>
-        </p:style>
-        <p:txBody>
-          <a:bodyPr rtlCol="0" anchor="ctr"/>
-          <a:lstStyle/>
-          <a:p>
-            <a:pPr algn="ctr"/>
-          </a:p>
-        </p:txBody>
-      </p:sp>
-      <p:sp>
-        <p:nvSpPr>
-          <p:cNvPr id="10" name="TextBox 9"/>
-          <p:cNvSpPr txBox="1"/>
-          <p:nvPr/>
-        </p:nvSpPr>
-        <p:spPr>
-          <a:xfrm>
-            <a:off x="914400" y="4251960"/>
-            <a:ext cx="4754880" cy="1828800"/>
-          </a:xfrm>
-          <a:prstGeom prst="rect">
-            <a:avLst/>
-          </a:prstGeom>
-          <a:noFill/>
-        </p:spPr>
-        <p:txBody>
-          <a:bodyPr wrap="square">
-            <a:spAutoFit/>
-          </a:bodyPr>
-          <a:lstStyle/>
-          <a:p>
-            <a:pPr>
-              <a:spcAft>
-                <a:spcPts val="800"/>
-              </a:spcAft>
-              <a:defRPr sz="1400" b="1">
-                <a:solidFill>
-                  <a:srgbClr val="64748B"/>
-                </a:solidFill>
-              </a:defRPr>
-            </a:pPr>
-            <a:r>
-              <a:t>Regime C: Abundant Stock / Cheap Holding</a:t>
-            </a:r>
-          </a:p>
-          <a:p>
-            <a:pPr>
-              <a:spcAft>
-                <a:spcPts val="400"/>
-              </a:spcAft>
-              <a:defRPr sz="1100">
-                <a:solidFill>
-                  <a:srgbClr val="1E293B"/>
-                </a:solidFill>
-              </a:defRPr>
-            </a:pPr>
-            <a:r>
-              <a:t>• Condition: W &gt;= 1.0 sum D, low margin consumables (b/h &lt;= 3:1).</a:t>
-            </a:r>
-          </a:p>
-          <a:p>
-            <a:pPr>
-              <a:spcAft>
-                <a:spcPts val="400"/>
-              </a:spcAft>
-              <a:defRPr sz="1100">
-                <a:solidFill>
-                  <a:srgbClr val="1E293B"/>
-                </a:solidFill>
-              </a:defRPr>
-            </a:pPr>
-            <a:r>
-              <a:t>• Policy: proportional_allocation (Trailing Sales Heuristic).</a:t>
-            </a:r>
-          </a:p>
-          <a:p>
-            <a:pPr>
-              <a:spcAft>
-                <a:spcPts val="400"/>
-              </a:spcAft>
-              <a:defRPr sz="1100">
-                <a:solidFill>
-                  <a:srgbClr val="1E293B"/>
-                </a:solidFill>
-              </a:defRPr>
-            </a:pPr>
-            <a:r>
-              <a:t>• Impact: Within 5% of optimal MILP; zero solver overhead; ideal edge fallback.</a:t>
-            </a:r>
-          </a:p>
-        </p:txBody>
-      </p:sp>
-      <p:sp>
-        <p:nvSpPr>
-          <p:cNvPr id="11" name="Rounded Rectangle 10"/>
-          <p:cNvSpPr/>
-          <p:nvPr/>
-        </p:nvSpPr>
-        <p:spPr>
-          <a:xfrm>
-            <a:off x="6217920" y="4114800"/>
-            <a:ext cx="5212080" cy="2103120"/>
-          </a:xfrm>
-          <a:prstGeom prst="roundRect">
-            <a:avLst/>
-          </a:prstGeom>
-          <a:solidFill>
-            <a:srgbClr val="F8FAFC"/>
-          </a:solidFill>
-          <a:ln w="19050">
-            <a:solidFill>
-              <a:srgbClr val="E2E8F0"/>
-            </a:solidFill>
-          </a:ln>
-        </p:spPr>
-        <p:style>
-          <a:lnRef idx="1">
-            <a:schemeClr val="accent1"/>
-          </a:lnRef>
-          <a:fillRef idx="3">
-            <a:schemeClr val="accent1"/>
-          </a:fillRef>
-          <a:effectRef idx="2">
-            <a:schemeClr val="accent1"/>
-          </a:effectRef>
-          <a:fontRef idx="minor">
-            <a:schemeClr val="lt1"/>
-          </a:fontRef>
-        </p:style>
-        <p:txBody>
-          <a:bodyPr rtlCol="0" anchor="ctr"/>
-          <a:lstStyle/>
-          <a:p>
-            <a:pPr algn="ctr"/>
-          </a:p>
-        </p:txBody>
-      </p:sp>
-      <p:sp>
-        <p:nvSpPr>
-          <p:cNvPr id="12" name="TextBox 11"/>
-          <p:cNvSpPr txBox="1"/>
-          <p:nvPr/>
-        </p:nvSpPr>
-        <p:spPr>
-          <a:xfrm>
-            <a:off x="6400800" y="4251960"/>
-            <a:ext cx="4846320" cy="1828800"/>
-          </a:xfrm>
-          <a:prstGeom prst="rect">
-            <a:avLst/>
-          </a:prstGeom>
-          <a:noFill/>
-        </p:spPr>
-        <p:txBody>
-          <a:bodyPr wrap="square">
-            <a:spAutoFit/>
-          </a:bodyPr>
-          <a:lstStyle/>
-          <a:p>
-            <a:pPr>
-              <a:spcAft>
-                <a:spcPts val="800"/>
-              </a:spcAft>
-              <a:defRPr sz="1400" b="1">
-                <a:solidFill>
-                  <a:srgbClr val="D97706"/>
-                </a:solidFill>
-              </a:defRPr>
-            </a:pPr>
-            <a:r>
-              <a:t>Regime D: Non-Negotiable Availability</a:t>
-            </a:r>
-          </a:p>
-          <a:p>
-            <a:pPr>
-              <a:spcAft>
-                <a:spcPts val="400"/>
-              </a:spcAft>
-              <a:defRPr sz="1100">
-                <a:solidFill>
-                  <a:srgbClr val="1E293B"/>
-                </a:solidFill>
-              </a:defRPr>
-            </a:pPr>
-            <a:r>
-              <a:t>• Condition: Promotional hero items, target fill rate beta* &gt;= 95%.</a:t>
-            </a:r>
-          </a:p>
-          <a:p>
-            <a:pPr>
-              <a:spcAft>
-                <a:spcPts val="400"/>
-              </a:spcAft>
-              <a:defRPr sz="1100">
-                <a:solidFill>
-                  <a:srgbClr val="1E293B"/>
-                </a:solidFill>
-              </a:defRPr>
-            </a:pPr>
-            <a:r>
-              <a:t>• Policy: service_level_milp (Service-Constrained Allocation).</a:t>
-            </a:r>
-          </a:p>
-          <a:p>
-            <a:pPr>
-              <a:spcAft>
-                <a:spcPts val="400"/>
-              </a:spcAft>
-              <a:defRPr sz="1100">
-                <a:solidFill>
-                  <a:srgbClr val="1E293B"/>
-                </a:solidFill>
-              </a:defRPr>
-            </a:pPr>
-            <a:r>
-              <a:t>• Impact: Proves physical supply sufficiency; calculates exact stock deficit.</a:t>
+              <a:t>Synthetic MU economics | Corrected v2 experiments | 4/7</a:t>
             </a:r>
           </a:p>
         </p:txBody>
@@ -6271,8 +5564,8 @@
         </p:nvSpPr>
         <p:spPr>
           <a:xfrm>
-            <a:off x="731520" y="457200"/>
-            <a:ext cx="7315200" cy="274320"/>
+            <a:off x="594360" y="365760"/>
+            <a:ext cx="10972800" cy="274320"/>
           </a:xfrm>
           <a:prstGeom prst="rect">
             <a:avLst/>
@@ -6286,14 +5579,18 @@
           <a:lstStyle/>
           <a:p>
             <a:pPr>
-              <a:defRPr sz="1000" b="1">
-                <a:solidFill>
-                  <a:srgbClr val="D97706"/>
-                </a:solidFill>
+              <a:spcAft>
+                <a:spcPts val="800"/>
+              </a:spcAft>
+              <a:defRPr sz="1100" b="1">
+                <a:solidFill>
+                  <a:srgbClr val="0369A1"/>
+                </a:solidFill>
+                <a:latin typeface="Arial"/>
               </a:defRPr>
             </a:pPr>
             <a:r>
-              <a:t>MR.DIY DECISION INTELLIGENCE</a:t>
+              <a:t>DECISION INTELLIGENCE / INTERVIEW RESEARCH PROTOTYPE</a:t>
             </a:r>
           </a:p>
         </p:txBody>
@@ -6306,8 +5603,8 @@
         </p:nvSpPr>
         <p:spPr>
           <a:xfrm>
-            <a:off x="731520" y="731520"/>
-            <a:ext cx="10515600" cy="548640"/>
+            <a:off x="594360" y="822960"/>
+            <a:ext cx="10972800" cy="594360"/>
           </a:xfrm>
           <a:prstGeom prst="rect">
             <a:avLst/>
@@ -6321,14 +5618,18 @@
           <a:lstStyle/>
           <a:p>
             <a:pPr>
-              <a:defRPr sz="2200" b="1">
+              <a:spcAft>
+                <a:spcPts val="800"/>
+              </a:spcAft>
+              <a:defRPr sz="2800" b="1">
                 <a:solidFill>
                   <a:srgbClr val="0F172A"/>
                 </a:solidFill>
+                <a:latin typeface="Arial"/>
               </a:defRPr>
             </a:pPr>
             <a:r>
-              <a:t>Empirical Benchmark: 7-Policy Evaluation &amp; Reliability</a:t>
+              <a:t>The strongest method depends on the setting</a:t>
             </a:r>
           </a:p>
         </p:txBody>
@@ -6341,8 +5642,8 @@
         </p:nvSpPr>
         <p:spPr>
           <a:xfrm>
-            <a:off x="731520" y="1280160"/>
-            <a:ext cx="10515600" cy="365760"/>
+            <a:off x="594360" y="1508760"/>
+            <a:ext cx="10972800" cy="457200"/>
           </a:xfrm>
           <a:prstGeom prst="rect">
             <a:avLst/>
@@ -6356,63 +5657,567 @@
           <a:lstStyle/>
           <a:p>
             <a:pPr>
-              <a:defRPr sz="1200">
-                <a:solidFill>
-                  <a:srgbClr val="64748B"/>
-                </a:solidFill>
+              <a:spcAft>
+                <a:spcPts val="800"/>
+              </a:spcAft>
+              <a:defRPr sz="1500" b="0">
+                <a:solidFill>
+                  <a:srgbClr val="475569"/>
+                </a:solidFill>
+                <a:latin typeface="Arial"/>
               </a:defRPr>
             </a:pPr>
             <a:r>
-              <a:t>Apples-to-apples out-of-sample backtest across 12 held-out origins with 3 independent random seeds.</a:t>
-            </a:r>
-          </a:p>
-        </p:txBody>
-      </p:sp>
-      <p:sp>
-        <p:nvSpPr>
-          <p:cNvPr id="5" name="Rounded Rectangle 4"/>
-          <p:cNvSpPr/>
+              <a:t>Primary seed 42: mean test-origin cost (synthetic MU; lower is better)</a:t>
+            </a:r>
+          </a:p>
+        </p:txBody>
+      </p:sp>
+      <p:graphicFrame>
+        <p:nvGraphicFramePr>
+          <p:cNvPr id="5" name="Table 4"/>
+          <p:cNvGraphicFramePr>
+            <a:graphicFrameLocks noGrp="1"/>
+          </p:cNvGraphicFramePr>
           <p:nvPr/>
-        </p:nvSpPr>
-        <p:spPr>
-          <a:xfrm>
-            <a:off x="731520" y="1828800"/>
-            <a:ext cx="5120640" cy="4389120"/>
-          </a:xfrm>
-          <a:prstGeom prst="roundRect">
-            <a:avLst/>
-          </a:prstGeom>
-          <a:solidFill>
-            <a:srgbClr val="F8FAFC"/>
-          </a:solidFill>
-          <a:ln w="19050">
-            <a:solidFill>
-              <a:srgbClr val="E2E8F0"/>
-            </a:solidFill>
-          </a:ln>
-        </p:spPr>
-        <p:style>
-          <a:lnRef idx="1">
-            <a:schemeClr val="accent1"/>
-          </a:lnRef>
-          <a:fillRef idx="3">
-            <a:schemeClr val="accent1"/>
-          </a:fillRef>
-          <a:effectRef idx="2">
-            <a:schemeClr val="accent1"/>
-          </a:effectRef>
-          <a:fontRef idx="minor">
-            <a:schemeClr val="lt1"/>
-          </a:fontRef>
-        </p:style>
-        <p:txBody>
-          <a:bodyPr rtlCol="0" anchor="ctr"/>
-          <a:lstStyle/>
-          <a:p>
-            <a:pPr algn="ctr"/>
-          </a:p>
-        </p:txBody>
-      </p:sp>
+        </p:nvGraphicFramePr>
+        <p:xfrm>
+          <a:off x="640080" y="2057400"/>
+          <a:ext cx="10881360" cy="2240280"/>
+        </p:xfrm>
+        <a:graphic>
+          <a:graphicData uri="http://schemas.openxmlformats.org/drawingml/2006/table">
+            <a:tbl>
+              <a:tblPr firstRow="1" bandRow="1">
+                <a:tableStyleId>{5C22544A-7EE6-4342-B048-85BDC9FD1C3A}</a:tableStyleId>
+              </a:tblPr>
+              <a:tblGrid>
+                <a:gridCol w="5029200"/>
+                <a:gridCol w="2926080"/>
+                <a:gridCol w="2926080"/>
+              </a:tblGrid>
+              <a:tr h="320040">
+                <a:tc>
+                  <a:txBody>
+                    <a:bodyPr/>
+                    <a:lstStyle/>
+                    <a:p>
+                      <a:pPr>
+                        <a:defRPr sz="1700">
+                          <a:solidFill>
+                            <a:srgbClr val="FFFFFF"/>
+                          </a:solidFill>
+                          <a:latin typeface="Arial"/>
+                        </a:defRPr>
+                      </a:pPr>
+                      <a:r>
+                        <a:t>Policy</a:t>
+                      </a:r>
+                    </a:p>
+                  </a:txBody>
+                  <a:tcPr>
+                    <a:solidFill>
+                      <a:srgbClr val="0F172A"/>
+                    </a:solidFill>
+                  </a:tcPr>
+                </a:tc>
+                <a:tc>
+                  <a:txBody>
+                    <a:bodyPr/>
+                    <a:lstStyle/>
+                    <a:p>
+                      <a:pPr>
+                        <a:defRPr sz="1700">
+                          <a:solidFill>
+                            <a:srgbClr val="FFFFFF"/>
+                          </a:solidFill>
+                          <a:latin typeface="Arial"/>
+                        </a:defRPr>
+                      </a:pPr>
+                      <a:r>
+                        <a:t>Regular M5</a:t>
+                      </a:r>
+                    </a:p>
+                  </a:txBody>
+                  <a:tcPr>
+                    <a:solidFill>
+                      <a:srgbClr val="0F172A"/>
+                    </a:solidFill>
+                  </a:tcPr>
+                </a:tc>
+                <a:tc>
+                  <a:txBody>
+                    <a:bodyPr/>
+                    <a:lstStyle/>
+                    <a:p>
+                      <a:pPr>
+                        <a:defRPr sz="1700">
+                          <a:solidFill>
+                            <a:srgbClr val="FFFFFF"/>
+                          </a:solidFill>
+                          <a:latin typeface="Arial"/>
+                        </a:defRPr>
+                      </a:pPr>
+                      <a:r>
+                        <a:t>Intermittent M5</a:t>
+                      </a:r>
+                    </a:p>
+                  </a:txBody>
+                  <a:tcPr>
+                    <a:solidFill>
+                      <a:srgbClr val="0F172A"/>
+                    </a:solidFill>
+                  </a:tcPr>
+                </a:tc>
+              </a:tr>
+              <a:tr h="320040">
+                <a:tc>
+                  <a:txBody>
+                    <a:bodyPr/>
+                    <a:lstStyle/>
+                    <a:p>
+                      <a:pPr>
+                        <a:defRPr sz="1700">
+                          <a:solidFill>
+                            <a:srgbClr val="1E293B"/>
+                          </a:solidFill>
+                          <a:latin typeface="Arial"/>
+                        </a:defRPr>
+                      </a:pPr>
+                      <a:r>
+                        <a:t>Equal allocation</a:t>
+                      </a:r>
+                    </a:p>
+                  </a:txBody>
+                  <a:tcPr>
+                    <a:solidFill>
+                      <a:srgbClr val="F1F5F9"/>
+                    </a:solidFill>
+                  </a:tcPr>
+                </a:tc>
+                <a:tc>
+                  <a:txBody>
+                    <a:bodyPr/>
+                    <a:lstStyle/>
+                    <a:p>
+                      <a:pPr>
+                        <a:defRPr sz="1700">
+                          <a:solidFill>
+                            <a:srgbClr val="1E293B"/>
+                          </a:solidFill>
+                          <a:latin typeface="Arial"/>
+                        </a:defRPr>
+                      </a:pPr>
+                      <a:r>
+                        <a:t>1432.35</a:t>
+                      </a:r>
+                    </a:p>
+                  </a:txBody>
+                  <a:tcPr>
+                    <a:solidFill>
+                      <a:srgbClr val="F1F5F9"/>
+                    </a:solidFill>
+                  </a:tcPr>
+                </a:tc>
+                <a:tc>
+                  <a:txBody>
+                    <a:bodyPr/>
+                    <a:lstStyle/>
+                    <a:p>
+                      <a:pPr>
+                        <a:defRPr sz="1700">
+                          <a:solidFill>
+                            <a:srgbClr val="1E293B"/>
+                          </a:solidFill>
+                          <a:latin typeface="Arial"/>
+                        </a:defRPr>
+                      </a:pPr>
+                      <a:r>
+                        <a:t>174.45</a:t>
+                      </a:r>
+                    </a:p>
+                  </a:txBody>
+                  <a:tcPr>
+                    <a:solidFill>
+                      <a:srgbClr val="F1F5F9"/>
+                    </a:solidFill>
+                  </a:tcPr>
+                </a:tc>
+              </a:tr>
+              <a:tr h="320040">
+                <a:tc>
+                  <a:txBody>
+                    <a:bodyPr/>
+                    <a:lstStyle/>
+                    <a:p>
+                      <a:pPr>
+                        <a:defRPr sz="1700">
+                          <a:solidFill>
+                            <a:srgbClr val="1E293B"/>
+                          </a:solidFill>
+                          <a:latin typeface="Arial"/>
+                        </a:defRPr>
+                      </a:pPr>
+                      <a:r>
+                        <a:t>Proportional allocation</a:t>
+                      </a:r>
+                    </a:p>
+                  </a:txBody>
+                  <a:tcPr>
+                    <a:solidFill>
+                      <a:srgbClr val="F1F5F9"/>
+                    </a:solidFill>
+                  </a:tcPr>
+                </a:tc>
+                <a:tc>
+                  <a:txBody>
+                    <a:bodyPr/>
+                    <a:lstStyle/>
+                    <a:p>
+                      <a:pPr>
+                        <a:defRPr sz="1700">
+                          <a:solidFill>
+                            <a:srgbClr val="1E293B"/>
+                          </a:solidFill>
+                          <a:latin typeface="Arial"/>
+                        </a:defRPr>
+                      </a:pPr>
+                      <a:r>
+                        <a:t>1298.91</a:t>
+                      </a:r>
+                    </a:p>
+                  </a:txBody>
+                  <a:tcPr>
+                    <a:solidFill>
+                      <a:srgbClr val="F1F5F9"/>
+                    </a:solidFill>
+                  </a:tcPr>
+                </a:tc>
+                <a:tc>
+                  <a:txBody>
+                    <a:bodyPr/>
+                    <a:lstStyle/>
+                    <a:p>
+                      <a:pPr>
+                        <a:defRPr sz="1700">
+                          <a:solidFill>
+                            <a:srgbClr val="1E293B"/>
+                          </a:solidFill>
+                          <a:latin typeface="Arial"/>
+                        </a:defRPr>
+                      </a:pPr>
+                      <a:r>
+                        <a:t>176.94</a:t>
+                      </a:r>
+                    </a:p>
+                  </a:txBody>
+                  <a:tcPr>
+                    <a:solidFill>
+                      <a:srgbClr val="F1F5F9"/>
+                    </a:solidFill>
+                  </a:tcPr>
+                </a:tc>
+              </a:tr>
+              <a:tr h="320040">
+                <a:tc>
+                  <a:txBody>
+                    <a:bodyPr/>
+                    <a:lstStyle/>
+                    <a:p>
+                      <a:pPr>
+                        <a:defRPr sz="1700">
+                          <a:solidFill>
+                            <a:srgbClr val="1E293B"/>
+                          </a:solidFill>
+                          <a:latin typeface="Arial"/>
+                        </a:defRPr>
+                      </a:pPr>
+                      <a:r>
+                        <a:t>Supervised PTO</a:t>
+                      </a:r>
+                    </a:p>
+                  </a:txBody>
+                  <a:tcPr>
+                    <a:solidFill>
+                      <a:srgbClr val="F1F5F9"/>
+                    </a:solidFill>
+                  </a:tcPr>
+                </a:tc>
+                <a:tc>
+                  <a:txBody>
+                    <a:bodyPr/>
+                    <a:lstStyle/>
+                    <a:p>
+                      <a:pPr>
+                        <a:defRPr sz="1700">
+                          <a:solidFill>
+                            <a:srgbClr val="1E293B"/>
+                          </a:solidFill>
+                          <a:latin typeface="Arial"/>
+                        </a:defRPr>
+                      </a:pPr>
+                      <a:r>
+                        <a:t>1311.54</a:t>
+                      </a:r>
+                    </a:p>
+                  </a:txBody>
+                  <a:tcPr>
+                    <a:solidFill>
+                      <a:srgbClr val="F1F5F9"/>
+                    </a:solidFill>
+                  </a:tcPr>
+                </a:tc>
+                <a:tc>
+                  <a:txBody>
+                    <a:bodyPr/>
+                    <a:lstStyle/>
+                    <a:p>
+                      <a:pPr>
+                        <a:defRPr sz="1700">
+                          <a:solidFill>
+                            <a:srgbClr val="1E293B"/>
+                          </a:solidFill>
+                          <a:latin typeface="Arial"/>
+                        </a:defRPr>
+                      </a:pPr>
+                      <a:r>
+                        <a:t>169.94</a:t>
+                      </a:r>
+                    </a:p>
+                  </a:txBody>
+                  <a:tcPr>
+                    <a:solidFill>
+                      <a:srgbClr val="F1F5F9"/>
+                    </a:solidFill>
+                  </a:tcPr>
+                </a:tc>
+              </a:tr>
+              <a:tr h="320040">
+                <a:tc>
+                  <a:txBody>
+                    <a:bodyPr/>
+                    <a:lstStyle/>
+                    <a:p>
+                      <a:pPr>
+                        <a:defRPr sz="1700">
+                          <a:solidFill>
+                            <a:srgbClr val="1E293B"/>
+                          </a:solidFill>
+                          <a:latin typeface="Arial"/>
+                        </a:defRPr>
+                      </a:pPr>
+                      <a:r>
+                        <a:t>Supervised DRO</a:t>
+                      </a:r>
+                    </a:p>
+                  </a:txBody>
+                  <a:tcPr>
+                    <a:solidFill>
+                      <a:srgbClr val="F1F5F9"/>
+                    </a:solidFill>
+                  </a:tcPr>
+                </a:tc>
+                <a:tc>
+                  <a:txBody>
+                    <a:bodyPr/>
+                    <a:lstStyle/>
+                    <a:p>
+                      <a:pPr>
+                        <a:defRPr sz="1700">
+                          <a:solidFill>
+                            <a:srgbClr val="1E293B"/>
+                          </a:solidFill>
+                          <a:latin typeface="Arial"/>
+                        </a:defRPr>
+                      </a:pPr>
+                      <a:r>
+                        <a:t>1320.18</a:t>
+                      </a:r>
+                    </a:p>
+                  </a:txBody>
+                  <a:tcPr>
+                    <a:solidFill>
+                      <a:srgbClr val="F1F5F9"/>
+                    </a:solidFill>
+                  </a:tcPr>
+                </a:tc>
+                <a:tc>
+                  <a:txBody>
+                    <a:bodyPr/>
+                    <a:lstStyle/>
+                    <a:p>
+                      <a:pPr>
+                        <a:defRPr sz="1700">
+                          <a:solidFill>
+                            <a:srgbClr val="1E293B"/>
+                          </a:solidFill>
+                          <a:latin typeface="Arial"/>
+                        </a:defRPr>
+                      </a:pPr>
+                      <a:r>
+                        <a:t>168.89</a:t>
+                      </a:r>
+                    </a:p>
+                  </a:txBody>
+                  <a:tcPr>
+                    <a:solidFill>
+                      <a:srgbClr val="F1F5F9"/>
+                    </a:solidFill>
+                  </a:tcPr>
+                </a:tc>
+              </a:tr>
+              <a:tr h="320040">
+                <a:tc>
+                  <a:txBody>
+                    <a:bodyPr/>
+                    <a:lstStyle/>
+                    <a:p>
+                      <a:pPr>
+                        <a:defRPr sz="1700">
+                          <a:solidFill>
+                            <a:srgbClr val="1E293B"/>
+                          </a:solidFill>
+                          <a:latin typeface="Arial"/>
+                        </a:defRPr>
+                      </a:pPr>
+                      <a:r>
+                        <a:t>DFL PTO</a:t>
+                      </a:r>
+                    </a:p>
+                  </a:txBody>
+                  <a:tcPr>
+                    <a:solidFill>
+                      <a:srgbClr val="F1F5F9"/>
+                    </a:solidFill>
+                  </a:tcPr>
+                </a:tc>
+                <a:tc>
+                  <a:txBody>
+                    <a:bodyPr/>
+                    <a:lstStyle/>
+                    <a:p>
+                      <a:pPr>
+                        <a:defRPr sz="1700">
+                          <a:solidFill>
+                            <a:srgbClr val="1E293B"/>
+                          </a:solidFill>
+                          <a:latin typeface="Arial"/>
+                        </a:defRPr>
+                      </a:pPr>
+                      <a:r>
+                        <a:t>1305.72</a:t>
+                      </a:r>
+                    </a:p>
+                  </a:txBody>
+                  <a:tcPr>
+                    <a:solidFill>
+                      <a:srgbClr val="F1F5F9"/>
+                    </a:solidFill>
+                  </a:tcPr>
+                </a:tc>
+                <a:tc>
+                  <a:txBody>
+                    <a:bodyPr/>
+                    <a:lstStyle/>
+                    <a:p>
+                      <a:pPr>
+                        <a:defRPr sz="1700">
+                          <a:solidFill>
+                            <a:srgbClr val="1E293B"/>
+                          </a:solidFill>
+                          <a:latin typeface="Arial"/>
+                        </a:defRPr>
+                      </a:pPr>
+                      <a:r>
+                        <a:t>179.67</a:t>
+                      </a:r>
+                    </a:p>
+                  </a:txBody>
+                  <a:tcPr>
+                    <a:solidFill>
+                      <a:srgbClr val="F1F5F9"/>
+                    </a:solidFill>
+                  </a:tcPr>
+                </a:tc>
+              </a:tr>
+              <a:tr h="320040">
+                <a:tc>
+                  <a:txBody>
+                    <a:bodyPr/>
+                    <a:lstStyle/>
+                    <a:p>
+                      <a:pPr>
+                        <a:defRPr sz="1700">
+                          <a:solidFill>
+                            <a:srgbClr val="1E293B"/>
+                          </a:solidFill>
+                          <a:latin typeface="Arial"/>
+                        </a:defRPr>
+                      </a:pPr>
+                      <a:r>
+                        <a:t>DFL + DRO</a:t>
+                      </a:r>
+                    </a:p>
+                  </a:txBody>
+                  <a:tcPr>
+                    <a:solidFill>
+                      <a:srgbClr val="F1F5F9"/>
+                    </a:solidFill>
+                  </a:tcPr>
+                </a:tc>
+                <a:tc>
+                  <a:txBody>
+                    <a:bodyPr/>
+                    <a:lstStyle/>
+                    <a:p>
+                      <a:pPr>
+                        <a:defRPr sz="1700">
+                          <a:solidFill>
+                            <a:srgbClr val="1E293B"/>
+                          </a:solidFill>
+                          <a:latin typeface="Arial"/>
+                        </a:defRPr>
+                      </a:pPr>
+                      <a:r>
+                        <a:t>1311.75</a:t>
+                      </a:r>
+                    </a:p>
+                  </a:txBody>
+                  <a:tcPr>
+                    <a:solidFill>
+                      <a:srgbClr val="F1F5F9"/>
+                    </a:solidFill>
+                  </a:tcPr>
+                </a:tc>
+                <a:tc>
+                  <a:txBody>
+                    <a:bodyPr/>
+                    <a:lstStyle/>
+                    <a:p>
+                      <a:pPr>
+                        <a:defRPr sz="1700">
+                          <a:solidFill>
+                            <a:srgbClr val="1E293B"/>
+                          </a:solidFill>
+                          <a:latin typeface="Arial"/>
+                        </a:defRPr>
+                      </a:pPr>
+                      <a:r>
+                        <a:t>179.11</a:t>
+                      </a:r>
+                    </a:p>
+                  </a:txBody>
+                  <a:tcPr>
+                    <a:solidFill>
+                      <a:srgbClr val="F1F5F9"/>
+                    </a:solidFill>
+                  </a:tcPr>
+                </a:tc>
+              </a:tr>
+            </a:tbl>
+          </a:graphicData>
+        </a:graphic>
+      </p:graphicFrame>
       <p:sp>
         <p:nvSpPr>
           <p:cNvPr id="6" name="TextBox 5"/>
@@ -6421,8 +6226,8 @@
         </p:nvSpPr>
         <p:spPr>
           <a:xfrm>
-            <a:off x="914400" y="1965960"/>
-            <a:ext cx="4754880" cy="4114800"/>
+            <a:off x="685800" y="4572000"/>
+            <a:ext cx="10835640" cy="1783080"/>
           </a:xfrm>
           <a:prstGeom prst="rect">
             <a:avLst/>
@@ -6439,193 +6244,61 @@
               <a:spcAft>
                 <a:spcPts val="800"/>
               </a:spcAft>
-              <a:defRPr sz="1400" b="1">
-                <a:solidFill>
-                  <a:srgbClr val="10B981"/>
-                </a:solidFill>
+              <a:defRPr sz="1600" b="0">
+                <a:solidFill>
+                  <a:srgbClr val="1E293B"/>
+                </a:solidFill>
+                <a:latin typeface="Arial"/>
               </a:defRPr>
             </a:pPr>
             <a:r>
-              <a:t>Benchmark Summary Table (M5 Household Cohort)</a:t>
+              <a:t>• Primary-seed non-oracle policies: regular winner proportional_allocation (1298.91 MU); intermittent winner supervised_dro (168.89 MU).</a:t>
             </a:r>
           </a:p>
           <a:p>
             <a:pPr>
               <a:spcAft>
-                <a:spcPts val="400"/>
+                <a:spcPts val="800"/>
               </a:spcAft>
-              <a:defRPr sz="1100">
+              <a:defRPr sz="1600" b="0">
                 <a:solidFill>
                   <a:srgbClr val="1E293B"/>
                 </a:solidFill>
+                <a:latin typeface="Arial"/>
               </a:defRPr>
             </a:pPr>
             <a:r>
-              <a:t>• Equal Allocation: Mean Cost = 1432.35 MU | CVaR90 = 1843.00 MU | Fill Rate = 71.2%</a:t>
+              <a:t>• Regular DFL+DRO minus supervised PTO: +0.20 MU; paired 95% band [-15.71, 10.66] MU.</a:t>
             </a:r>
           </a:p>
           <a:p>
             <a:pPr>
               <a:spcAft>
-                <a:spcPts val="400"/>
+                <a:spcPts val="800"/>
               </a:spcAft>
-              <a:defRPr sz="1100">
+              <a:defRPr sz="1600" b="0">
                 <a:solidFill>
                   <a:srgbClr val="1E293B"/>
                 </a:solidFill>
+                <a:latin typeface="Arial"/>
               </a:defRPr>
             </a:pPr>
             <a:r>
-              <a:t>• Proportional Allocation: Mean Cost = 1298.91 MU | CVaR90 = 1711.69 MU | Fill Rate = 73.9%</a:t>
-            </a:r>
-          </a:p>
-          <a:p>
-            <a:pPr>
-              <a:spcAft>
-                <a:spcPts val="400"/>
-              </a:spcAft>
-              <a:defRPr sz="1100">
-                <a:solidFill>
-                  <a:srgbClr val="1E293B"/>
-                </a:solidFill>
-              </a:defRPr>
-            </a:pPr>
-            <a:r>
-              <a:t>• Supervised PTO: Mean Cost = 1322.76 MU | CVaR90 = 1708.12 MU | Fill Rate = 73.5%</a:t>
-            </a:r>
-          </a:p>
-          <a:p>
-            <a:pPr>
-              <a:spcAft>
-                <a:spcPts val="400"/>
-              </a:spcAft>
-              <a:defRPr sz="1100">
-                <a:solidFill>
-                  <a:srgbClr val="1E293B"/>
-                </a:solidFill>
-              </a:defRPr>
-            </a:pPr>
-            <a:r>
-              <a:t>• Supervised DRO (alpha=0.90): Mean Cost = 1315.14 MU | CVaR90 = 1677.40 MU | Fill Rate = 73.6%</a:t>
-            </a:r>
-          </a:p>
-          <a:p>
-            <a:pPr>
-              <a:spcAft>
-                <a:spcPts val="400"/>
-              </a:spcAft>
-              <a:defRPr sz="1100">
-                <a:solidFill>
-                  <a:srgbClr val="1E293B"/>
-                </a:solidFill>
-              </a:defRPr>
-            </a:pPr>
-            <a:r>
-              <a:t>• DFL-PTO (SPO+): Mean Cost = 1312.70 MU | CVaR90 = 1686.33 MU | Fill Rate = 73.6%</a:t>
-            </a:r>
-          </a:p>
-          <a:p>
-            <a:pPr>
-              <a:spcAft>
-                <a:spcPts val="400"/>
-              </a:spcAft>
-              <a:defRPr sz="1100">
-                <a:solidFill>
-                  <a:srgbClr val="1E293B"/>
-                </a:solidFill>
-              </a:defRPr>
-            </a:pPr>
-            <a:r>
-              <a:t>• DFL-DRO (Integrated): Mean Cost = 1328.63 MU | CVaR90 = 1689.26 MU | Fill Rate = 73.3%</a:t>
-            </a:r>
-          </a:p>
-          <a:p>
-            <a:pPr>
-              <a:spcAft>
-                <a:spcPts val="400"/>
-              </a:spcAft>
-              <a:defRPr sz="1100">
-                <a:solidFill>
-                  <a:srgbClr val="1E293B"/>
-                </a:solidFill>
-              </a:defRPr>
-            </a:pPr>
-            <a:r>
-              <a:t>• Clairvoyant Oracle (Hindsight): Mean Cost = 1020.15 MU | Fill Rate = 79.2%</a:t>
-            </a:r>
-          </a:p>
-          <a:p>
-            <a:pPr>
-              <a:spcAft>
-                <a:spcPts val="400"/>
-              </a:spcAft>
-              <a:defRPr sz="1100">
-                <a:solidFill>
-                  <a:srgbClr val="1E293B"/>
-                </a:solidFill>
-              </a:defRPr>
-            </a:pPr>
-            <a:r>
-              <a:t>• Key Finding: dfl_pto (1312.70 MU) and supervised_dro (1315.14 MU) beat supervised_pto (1322.76 MU) and reduce cost by -8.4% vs equal allocation.</a:t>
-            </a:r>
-          </a:p>
-        </p:txBody>
-      </p:sp>
-      <p:sp>
-        <p:nvSpPr>
-          <p:cNvPr id="7" name="Rounded Rectangle 6"/>
-          <p:cNvSpPr/>
+              <a:t>• Primary-seed rankings vary across seeds and objectives. Full seed results are retained; universal superiority is not established.</a:t>
+            </a:r>
+          </a:p>
+        </p:txBody>
+      </p:sp>
+      <p:sp>
+        <p:nvSpPr>
+          <p:cNvPr id="7" name="TextBox 6"/>
+          <p:cNvSpPr txBox="1"/>
           <p:nvPr/>
         </p:nvSpPr>
         <p:spPr>
           <a:xfrm>
-            <a:off x="6217920" y="1828800"/>
-            <a:ext cx="5212080" cy="4389120"/>
-          </a:xfrm>
-          <a:prstGeom prst="roundRect">
-            <a:avLst/>
-          </a:prstGeom>
-          <a:solidFill>
-            <a:srgbClr val="F8FAFC"/>
-          </a:solidFill>
-          <a:ln w="19050">
-            <a:solidFill>
-              <a:srgbClr val="E2E8F0"/>
-            </a:solidFill>
-          </a:ln>
-        </p:spPr>
-        <p:style>
-          <a:lnRef idx="1">
-            <a:schemeClr val="accent1"/>
-          </a:lnRef>
-          <a:fillRef idx="3">
-            <a:schemeClr val="accent1"/>
-          </a:fillRef>
-          <a:effectRef idx="2">
-            <a:schemeClr val="accent1"/>
-          </a:effectRef>
-          <a:fontRef idx="minor">
-            <a:schemeClr val="lt1"/>
-          </a:fontRef>
-        </p:style>
-        <p:txBody>
-          <a:bodyPr rtlCol="0" anchor="ctr"/>
-          <a:lstStyle/>
-          <a:p>
-            <a:pPr algn="ctr"/>
-          </a:p>
-        </p:txBody>
-      </p:sp>
-      <p:sp>
-        <p:nvSpPr>
-          <p:cNvPr id="8" name="TextBox 7"/>
-          <p:cNvSpPr txBox="1"/>
-          <p:nvPr/>
-        </p:nvSpPr>
-        <p:spPr>
-          <a:xfrm>
-            <a:off x="6400800" y="1965960"/>
-            <a:ext cx="4846320" cy="4114800"/>
+            <a:off x="594360" y="6428232"/>
+            <a:ext cx="10972800" cy="228600"/>
           </a:xfrm>
           <a:prstGeom prst="rect">
             <a:avLst/>
@@ -6642,89 +6315,15 @@
               <a:spcAft>
                 <a:spcPts val="800"/>
               </a:spcAft>
-              <a:defRPr sz="1400" b="1">
-                <a:solidFill>
-                  <a:srgbClr val="0284C7"/>
-                </a:solidFill>
+              <a:defRPr sz="1000" b="0">
+                <a:solidFill>
+                  <a:srgbClr val="64748B"/>
+                </a:solidFill>
+                <a:latin typeface="Arial"/>
               </a:defRPr>
             </a:pPr>
             <a:r>
-              <a:t>Multi-Seed Reliability &amp; Carryover Dynamics</a:t>
-            </a:r>
-          </a:p>
-          <a:p>
-            <a:pPr>
-              <a:spcAft>
-                <a:spcPts val="400"/>
-              </a:spcAft>
-              <a:defRPr sz="1100">
-                <a:solidFill>
-                  <a:srgbClr val="1E293B"/>
-                </a:solidFill>
-              </a:defRPr>
-            </a:pPr>
-            <a:r>
-              <a:t>• Multi-Seed Proof: Across seeds [42, 101, 202], dfl_pto beats supervised_pto in 100% of seeds (1305.74 ± 6.05 MU vs 1322.71 ± 4.41 MU).</a:t>
-            </a:r>
-          </a:p>
-          <a:p>
-            <a:pPr>
-              <a:spcAft>
-                <a:spcPts val="400"/>
-              </a:spcAft>
-              <a:defRPr sz="1100">
-                <a:solidFill>
-                  <a:srgbClr val="1E293B"/>
-                </a:solidFill>
-              </a:defRPr>
-            </a:pPr>
-            <a:r>
-              <a:t>• Rolling Carryover (L=0 Immediate): dfl_dro wins #1 (1230.94 MU), beating supervised_pto (1526.37 MU) by -19.4% (-295.43 MU)!</a:t>
-            </a:r>
-          </a:p>
-          <a:p>
-            <a:pPr>
-              <a:spcAft>
-                <a:spcPts val="400"/>
-              </a:spcAft>
-              <a:defRPr sz="1100">
-                <a:solidFill>
-                  <a:srgbClr val="1E293B"/>
-                </a:solidFill>
-              </a:defRPr>
-            </a:pPr>
-            <a:r>
-              <a:t>• Rolling Carryover (L=1 Transit): dfl_dro wins #1 (1526.90 MU), beating supervised_pto (1628.22 MU) by -6.2% (-101.32 MU)!</a:t>
-            </a:r>
-          </a:p>
-          <a:p>
-            <a:pPr>
-              <a:spcAft>
-                <a:spcPts val="400"/>
-              </a:spcAft>
-              <a:defRPr sz="1100">
-                <a:solidFill>
-                  <a:srgbClr val="1E293B"/>
-                </a:solidFill>
-              </a:defRPr>
-            </a:pPr>
-            <a:r>
-              <a:t>• Physical Mass Balance: 100% mass balance verified: I_end = I_start + Arrivals - Sales. Zero phantom stock.</a:t>
-            </a:r>
-          </a:p>
-          <a:p>
-            <a:pPr>
-              <a:spcAft>
-                <a:spcPts val="400"/>
-              </a:spcAft>
-              <a:defRPr sz="1100">
-                <a:solidFill>
-                  <a:srgbClr val="1E293B"/>
-                </a:solidFill>
-              </a:defRPr>
-            </a:pPr>
-            <a:r>
-              <a:t>• Non-Negative Oracle Regret: Verified &gt;= 0.0 in 100% of test origins; zero artificial regret clipping.</a:t>
+              <a:t>Synthetic MU economics | Corrected v2 experiments | 5/7</a:t>
             </a:r>
           </a:p>
         </p:txBody>
@@ -6755,8 +6354,8 @@
         </p:nvSpPr>
         <p:spPr>
           <a:xfrm>
-            <a:off x="731520" y="457200"/>
-            <a:ext cx="7315200" cy="274320"/>
+            <a:off x="594360" y="365760"/>
+            <a:ext cx="10972800" cy="274320"/>
           </a:xfrm>
           <a:prstGeom prst="rect">
             <a:avLst/>
@@ -6770,14 +6369,18 @@
           <a:lstStyle/>
           <a:p>
             <a:pPr>
-              <a:defRPr sz="1000" b="1">
-                <a:solidFill>
-                  <a:srgbClr val="D97706"/>
-                </a:solidFill>
+              <a:spcAft>
+                <a:spcPts val="800"/>
+              </a:spcAft>
+              <a:defRPr sz="1100" b="1">
+                <a:solidFill>
+                  <a:srgbClr val="0369A1"/>
+                </a:solidFill>
+                <a:latin typeface="Arial"/>
               </a:defRPr>
             </a:pPr>
             <a:r>
-              <a:t>MR.DIY DECISION INTELLIGENCE</a:t>
+              <a:t>DECISION INTELLIGENCE / INTERVIEW RESEARCH PROTOTYPE</a:t>
             </a:r>
           </a:p>
         </p:txBody>
@@ -6790,8 +6393,8 @@
         </p:nvSpPr>
         <p:spPr>
           <a:xfrm>
-            <a:off x="731520" y="731520"/>
-            <a:ext cx="10515600" cy="548640"/>
+            <a:off x="594360" y="822960"/>
+            <a:ext cx="10972800" cy="594360"/>
           </a:xfrm>
           <a:prstGeom prst="rect">
             <a:avLst/>
@@ -6805,14 +6408,18 @@
           <a:lstStyle/>
           <a:p>
             <a:pPr>
-              <a:defRPr sz="2200" b="1">
+              <a:spcAft>
+                <a:spcPts val="800"/>
+              </a:spcAft>
+              <a:defRPr sz="2800" b="1">
                 <a:solidFill>
                   <a:srgbClr val="0F172A"/>
                 </a:solidFill>
+                <a:latin typeface="Arial"/>
               </a:defRPr>
             </a:pPr>
             <a:r>
-              <a:t>Production Engineering &amp; MR.DIY Implementation Roadmap</a:t>
+              <a:t>A decision tool makes the trade-off visible</a:t>
             </a:r>
           </a:p>
         </p:txBody>
@@ -6825,8 +6432,8 @@
         </p:nvSpPr>
         <p:spPr>
           <a:xfrm>
-            <a:off x="731520" y="1280160"/>
-            <a:ext cx="10515600" cy="365760"/>
+            <a:off x="594360" y="1508760"/>
+            <a:ext cx="10972800" cy="457200"/>
           </a:xfrm>
           <a:prstGeom prst="rect">
             <a:avLst/>
@@ -6840,73 +6447,32 @@
           <a:lstStyle/>
           <a:p>
             <a:pPr>
-              <a:defRPr sz="1200">
-                <a:solidFill>
-                  <a:srgbClr val="64748B"/>
-                </a:solidFill>
+              <a:spcAft>
+                <a:spcPts val="800"/>
+              </a:spcAft>
+              <a:defRPr sz="1500" b="0">
+                <a:solidFill>
+                  <a:srgbClr val="475569"/>
+                </a:solidFill>
+                <a:latin typeface="Arial"/>
               </a:defRPr>
             </a:pPr>
             <a:r>
-              <a:t>A phased 4-stage operational plan to scale from pilot to 1,200 stores and 50,000 SKUs.</a:t>
-            </a:r>
-          </a:p>
-        </p:txBody>
-      </p:sp>
-      <p:sp>
-        <p:nvSpPr>
-          <p:cNvPr id="5" name="Rounded Rectangle 4"/>
-          <p:cNvSpPr/>
+              <a:t>60-second local demonstration; cached models, fresh optimization</a:t>
+            </a:r>
+          </a:p>
+        </p:txBody>
+      </p:sp>
+      <p:sp>
+        <p:nvSpPr>
+          <p:cNvPr id="5" name="TextBox 4"/>
+          <p:cNvSpPr txBox="1"/>
           <p:nvPr/>
         </p:nvSpPr>
         <p:spPr>
           <a:xfrm>
-            <a:off x="731520" y="1828800"/>
-            <a:ext cx="5120640" cy="2103120"/>
-          </a:xfrm>
-          <a:prstGeom prst="roundRect">
-            <a:avLst/>
-          </a:prstGeom>
-          <a:solidFill>
-            <a:srgbClr val="F8FAFC"/>
-          </a:solidFill>
-          <a:ln w="19050">
-            <a:solidFill>
-              <a:srgbClr val="E2E8F0"/>
-            </a:solidFill>
-          </a:ln>
-        </p:spPr>
-        <p:style>
-          <a:lnRef idx="1">
-            <a:schemeClr val="accent1"/>
-          </a:lnRef>
-          <a:fillRef idx="3">
-            <a:schemeClr val="accent1"/>
-          </a:fillRef>
-          <a:effectRef idx="2">
-            <a:schemeClr val="accent1"/>
-          </a:effectRef>
-          <a:fontRef idx="minor">
-            <a:schemeClr val="lt1"/>
-          </a:fontRef>
-        </p:style>
-        <p:txBody>
-          <a:bodyPr rtlCol="0" anchor="ctr"/>
-          <a:lstStyle/>
-          <a:p>
-            <a:pPr algn="ctr"/>
-          </a:p>
-        </p:txBody>
-      </p:sp>
-      <p:sp>
-        <p:nvSpPr>
-          <p:cNvPr id="6" name="TextBox 5"/>
-          <p:cNvSpPr txBox="1"/>
-          <p:nvPr/>
-        </p:nvSpPr>
-        <p:spPr>
-          <a:xfrm>
-            <a:off x="914400" y="1965960"/>
-            <a:ext cx="4754880" cy="1828800"/>
+            <a:off x="685800" y="2148840"/>
+            <a:ext cx="10835640" cy="4206240"/>
           </a:xfrm>
           <a:prstGeom prst="rect">
             <a:avLst/>
@@ -6923,118 +6489,109 @@
               <a:spcAft>
                 <a:spcPts val="800"/>
               </a:spcAft>
-              <a:defRPr sz="1400" b="1">
-                <a:solidFill>
-                  <a:srgbClr val="0284C7"/>
-                </a:solidFill>
+              <a:defRPr sz="1900" b="0">
+                <a:solidFill>
+                  <a:srgbClr val="1E293B"/>
+                </a:solidFill>
+                <a:latin typeface="Arial"/>
               </a:defRPr>
             </a:pPr>
             <a:r>
-              <a:t>Stage 1: Shadow Run &amp; Digital Twin (Weeks 1-4)</a:t>
+              <a:t>• Page A: identify the M5-proxy badge, synthetic MU economics and chronological data split.</a:t>
             </a:r>
           </a:p>
           <a:p>
             <a:pPr>
               <a:spcAft>
-                <a:spcPts val="400"/>
+                <a:spcPts val="800"/>
               </a:spcAft>
-              <a:defRPr sz="1100">
+              <a:defRPr sz="1900" b="0">
                 <a:solidFill>
                   <a:srgbClr val="1E293B"/>
                 </a:solidFill>
+                <a:latin typeface="Arial"/>
               </a:defRPr>
             </a:pPr>
             <a:r>
-              <a:t>• Run InventoryStateTransitionSystem in passive shadow mode against DC shipment logs.</a:t>
+              <a:t>• Page C: inspect integer shipments, available supply, store capacity and expected shortage/excess.</a:t>
             </a:r>
           </a:p>
           <a:p>
             <a:pPr>
               <a:spcAft>
-                <a:spcPts val="400"/>
+                <a:spcPts val="800"/>
               </a:spcAft>
-              <a:defRPr sz="1100">
+              <a:defRPr sz="1900" b="0">
                 <a:solidFill>
                   <a:srgbClr val="1E293B"/>
                 </a:solidFill>
+                <a:latin typeface="Arial"/>
               </a:defRPr>
             </a:pPr>
             <a:r>
-              <a:t>• Continuous nonanticipativity audit on live MR.DIY ERP feeds.</a:t>
+              <a:t>• Page D: compare model expected cost, model CVaR and realized historical test cost as separate metrics.</a:t>
             </a:r>
           </a:p>
           <a:p>
             <a:pPr>
               <a:spcAft>
-                <a:spcPts val="400"/>
+                <a:spcPts val="800"/>
               </a:spcAft>
-              <a:defRPr sz="1100">
+              <a:defRPr sz="1900" b="0">
                 <a:solidFill>
                   <a:srgbClr val="1E293B"/>
                 </a:solidFill>
+                <a:latin typeface="Arial"/>
               </a:defRPr>
             </a:pPr>
             <a:r>
-              <a:t>• Sub-50ms solver latency benchmark on commodity CPU servers.</a:t>
-            </a:r>
-          </a:p>
-        </p:txBody>
-      </p:sp>
-      <p:sp>
-        <p:nvSpPr>
-          <p:cNvPr id="7" name="Rounded Rectangle 6"/>
-          <p:cNvSpPr/>
+              <a:t>• Change supply to 0.8 or demand uplift to +25%. Uplift is explicitly a synthetic intervention.</a:t>
+            </a:r>
+          </a:p>
+          <a:p>
+            <a:pPr>
+              <a:spcAft>
+                <a:spcPts val="800"/>
+              </a:spcAft>
+              <a:defRPr sz="1900" b="0">
+                <a:solidFill>
+                  <a:srgbClr val="1E293B"/>
+                </a:solidFill>
+                <a:latin typeface="Arial"/>
+              </a:defRPr>
+            </a:pPr>
+            <a:r>
+              <a:t>• Hard service mode meets a feasible target or separately establishes maximum achievable service. Soft mode permits a cost trade-off.</a:t>
+            </a:r>
+          </a:p>
+          <a:p>
+            <a:pPr>
+              <a:spcAft>
+                <a:spcPts val="800"/>
+              </a:spcAft>
+              <a:defRPr sz="1900" b="0">
+                <a:solidFill>
+                  <a:srgbClr val="1E293B"/>
+                </a:solidFill>
+                <a:latin typeface="Arial"/>
+              </a:defRPr>
+            </a:pPr>
+            <a:r>
+              <a:t>• Page E: show paired results and the baseline winner. Download CSVs; no training runs inside the UI.</a:t>
+            </a:r>
+          </a:p>
+        </p:txBody>
+      </p:sp>
+      <p:sp>
+        <p:nvSpPr>
+          <p:cNvPr id="6" name="TextBox 5"/>
+          <p:cNvSpPr txBox="1"/>
           <p:nvPr/>
         </p:nvSpPr>
         <p:spPr>
           <a:xfrm>
-            <a:off x="6217920" y="1828800"/>
-            <a:ext cx="5212080" cy="2103120"/>
-          </a:xfrm>
-          <a:prstGeom prst="roundRect">
-            <a:avLst/>
-          </a:prstGeom>
-          <a:solidFill>
-            <a:srgbClr val="F8FAFC"/>
-          </a:solidFill>
-          <a:ln w="19050">
-            <a:solidFill>
-              <a:srgbClr val="E2E8F0"/>
-            </a:solidFill>
-          </a:ln>
-        </p:spPr>
-        <p:style>
-          <a:lnRef idx="1">
-            <a:schemeClr val="accent1"/>
-          </a:lnRef>
-          <a:fillRef idx="3">
-            <a:schemeClr val="accent1"/>
-          </a:fillRef>
-          <a:effectRef idx="2">
-            <a:schemeClr val="accent1"/>
-          </a:effectRef>
-          <a:fontRef idx="minor">
-            <a:schemeClr val="lt1"/>
-          </a:fontRef>
-        </p:style>
-        <p:txBody>
-          <a:bodyPr rtlCol="0" anchor="ctr"/>
-          <a:lstStyle/>
-          <a:p>
-            <a:pPr algn="ctr"/>
-          </a:p>
-        </p:txBody>
-      </p:sp>
-      <p:sp>
-        <p:nvSpPr>
-          <p:cNvPr id="8" name="TextBox 7"/>
-          <p:cNvSpPr txBox="1"/>
-          <p:nvPr/>
-        </p:nvSpPr>
-        <p:spPr>
-          <a:xfrm>
-            <a:off x="6400800" y="1965960"/>
-            <a:ext cx="4846320" cy="1828800"/>
+            <a:off x="594360" y="6428232"/>
+            <a:ext cx="10972800" cy="228600"/>
           </a:xfrm>
           <a:prstGeom prst="rect">
             <a:avLst/>
@@ -7051,315 +6608,15 @@
               <a:spcAft>
                 <a:spcPts val="800"/>
               </a:spcAft>
-              <a:defRPr sz="1400" b="1">
-                <a:solidFill>
-                  <a:srgbClr val="10B981"/>
-                </a:solidFill>
+              <a:defRPr sz="1000" b="0">
+                <a:solidFill>
+                  <a:srgbClr val="64748B"/>
+                </a:solidFill>
+                <a:latin typeface="Arial"/>
               </a:defRPr>
             </a:pPr>
             <a:r>
-              <a:t>Stage 2: Pilot Rollout on Top FMCG (Weeks 5-10)</a:t>
-            </a:r>
-          </a:p>
-          <a:p>
-            <a:pPr>
-              <a:spcAft>
-                <a:spcPts val="400"/>
-              </a:spcAft>
-              <a:defRPr sz="1100">
-                <a:solidFill>
-                  <a:srgbClr val="1E293B"/>
-                </a:solidFill>
-              </a:defRPr>
-            </a:pPr>
-            <a:r>
-              <a:t>• Deploy dfl_dro on top 200 revenue Household and Electrical SKUs.</a:t>
-            </a:r>
-          </a:p>
-          <a:p>
-            <a:pPr>
-              <a:spcAft>
-                <a:spcPts val="400"/>
-              </a:spcAft>
-              <a:defRPr sz="1100">
-                <a:solidFill>
-                  <a:srgbClr val="1E293B"/>
-                </a:solidFill>
-              </a:defRPr>
-            </a:pPr>
-            <a:r>
-              <a:t>• Provide Category Managers with Streamlit What-If Decision Cockpit.</a:t>
-            </a:r>
-          </a:p>
-          <a:p>
-            <a:pPr>
-              <a:spcAft>
-                <a:spcPts val="400"/>
-              </a:spcAft>
-              <a:defRPr sz="1100">
-                <a:solidFill>
-                  <a:srgbClr val="1E293B"/>
-                </a:solidFill>
-              </a:defRPr>
-            </a:pPr>
-            <a:r>
-              <a:t>• Run regional A/B trial: Central Region (DFL) vs Northern (PTO).</a:t>
-            </a:r>
-          </a:p>
-        </p:txBody>
-      </p:sp>
-      <p:sp>
-        <p:nvSpPr>
-          <p:cNvPr id="9" name="Rounded Rectangle 8"/>
-          <p:cNvSpPr/>
-          <p:nvPr/>
-        </p:nvSpPr>
-        <p:spPr>
-          <a:xfrm>
-            <a:off x="731520" y="4114800"/>
-            <a:ext cx="5120640" cy="2103120"/>
-          </a:xfrm>
-          <a:prstGeom prst="roundRect">
-            <a:avLst/>
-          </a:prstGeom>
-          <a:solidFill>
-            <a:srgbClr val="F8FAFC"/>
-          </a:solidFill>
-          <a:ln w="19050">
-            <a:solidFill>
-              <a:srgbClr val="E2E8F0"/>
-            </a:solidFill>
-          </a:ln>
-        </p:spPr>
-        <p:style>
-          <a:lnRef idx="1">
-            <a:schemeClr val="accent1"/>
-          </a:lnRef>
-          <a:fillRef idx="3">
-            <a:schemeClr val="accent1"/>
-          </a:fillRef>
-          <a:effectRef idx="2">
-            <a:schemeClr val="accent1"/>
-          </a:effectRef>
-          <a:fontRef idx="minor">
-            <a:schemeClr val="lt1"/>
-          </a:fontRef>
-        </p:style>
-        <p:txBody>
-          <a:bodyPr rtlCol="0" anchor="ctr"/>
-          <a:lstStyle/>
-          <a:p>
-            <a:pPr algn="ctr"/>
-          </a:p>
-        </p:txBody>
-      </p:sp>
-      <p:sp>
-        <p:nvSpPr>
-          <p:cNvPr id="10" name="TextBox 9"/>
-          <p:cNvSpPr txBox="1"/>
-          <p:nvPr/>
-        </p:nvSpPr>
-        <p:spPr>
-          <a:xfrm>
-            <a:off x="914400" y="4251960"/>
-            <a:ext cx="4754880" cy="1828800"/>
-          </a:xfrm>
-          <a:prstGeom prst="rect">
-            <a:avLst/>
-          </a:prstGeom>
-          <a:noFill/>
-        </p:spPr>
-        <p:txBody>
-          <a:bodyPr wrap="square">
-            <a:spAutoFit/>
-          </a:bodyPr>
-          <a:lstStyle/>
-          <a:p>
-            <a:pPr>
-              <a:spcAft>
-                <a:spcPts val="800"/>
-              </a:spcAft>
-              <a:defRPr sz="1400" b="1">
-                <a:solidFill>
-                  <a:srgbClr val="D97706"/>
-                </a:solidFill>
-              </a:defRPr>
-            </a:pPr>
-            <a:r>
-              <a:t>Stage 3: Multi-SKU Capacity Coupling (Weeks 11-16)</a:t>
-            </a:r>
-          </a:p>
-          <a:p>
-            <a:pPr>
-              <a:spcAft>
-                <a:spcPts val="400"/>
-              </a:spcAft>
-              <a:defRPr sz="1100">
-                <a:solidFill>
-                  <a:srgbClr val="1E293B"/>
-                </a:solidFill>
-              </a:defRPr>
-            </a:pPr>
-            <a:r>
-              <a:t>• Incorporate joint store volume constraints (m3) across all departments.</a:t>
-            </a:r>
-          </a:p>
-          <a:p>
-            <a:pPr>
-              <a:spcAft>
-                <a:spcPts val="400"/>
-              </a:spcAft>
-              <a:defRPr sz="1100">
-                <a:solidFill>
-                  <a:srgbClr val="1E293B"/>
-                </a:solidFill>
-              </a:defRPr>
-            </a:pPr>
-            <a:r>
-              <a:t>• Add pallet packaging limits and multi-stop fleet delivery routes.</a:t>
-            </a:r>
-          </a:p>
-          <a:p>
-            <a:pPr>
-              <a:spcAft>
-                <a:spcPts val="400"/>
-              </a:spcAft>
-              <a:defRPr sz="1100">
-                <a:solidFill>
-                  <a:srgbClr val="1E293B"/>
-                </a:solidFill>
-              </a:defRPr>
-            </a:pPr>
-            <a:r>
-              <a:t>• Sparse HiGHS matrix optimization scaling to 10,000 SKU-store pairs.</a:t>
-            </a:r>
-          </a:p>
-        </p:txBody>
-      </p:sp>
-      <p:sp>
-        <p:nvSpPr>
-          <p:cNvPr id="11" name="Rounded Rectangle 10"/>
-          <p:cNvSpPr/>
-          <p:nvPr/>
-        </p:nvSpPr>
-        <p:spPr>
-          <a:xfrm>
-            <a:off x="6217920" y="4114800"/>
-            <a:ext cx="5212080" cy="2103120"/>
-          </a:xfrm>
-          <a:prstGeom prst="roundRect">
-            <a:avLst/>
-          </a:prstGeom>
-          <a:solidFill>
-            <a:srgbClr val="F8FAFC"/>
-          </a:solidFill>
-          <a:ln w="19050">
-            <a:solidFill>
-              <a:srgbClr val="E2E8F0"/>
-            </a:solidFill>
-          </a:ln>
-        </p:spPr>
-        <p:style>
-          <a:lnRef idx="1">
-            <a:schemeClr val="accent1"/>
-          </a:lnRef>
-          <a:fillRef idx="3">
-            <a:schemeClr val="accent1"/>
-          </a:fillRef>
-          <a:effectRef idx="2">
-            <a:schemeClr val="accent1"/>
-          </a:effectRef>
-          <a:fontRef idx="minor">
-            <a:schemeClr val="lt1"/>
-          </a:fontRef>
-        </p:style>
-        <p:txBody>
-          <a:bodyPr rtlCol="0" anchor="ctr"/>
-          <a:lstStyle/>
-          <a:p>
-            <a:pPr algn="ctr"/>
-          </a:p>
-        </p:txBody>
-      </p:sp>
-      <p:sp>
-        <p:nvSpPr>
-          <p:cNvPr id="12" name="TextBox 11"/>
-          <p:cNvSpPr txBox="1"/>
-          <p:nvPr/>
-        </p:nvSpPr>
-        <p:spPr>
-          <a:xfrm>
-            <a:off x="6400800" y="4251960"/>
-            <a:ext cx="4846320" cy="1828800"/>
-          </a:xfrm>
-          <a:prstGeom prst="rect">
-            <a:avLst/>
-          </a:prstGeom>
-          <a:noFill/>
-        </p:spPr>
-        <p:txBody>
-          <a:bodyPr wrap="square">
-            <a:spAutoFit/>
-          </a:bodyPr>
-          <a:lstStyle/>
-          <a:p>
-            <a:pPr>
-              <a:spcAft>
-                <a:spcPts val="800"/>
-              </a:spcAft>
-              <a:defRPr sz="1400" b="1">
-                <a:solidFill>
-                  <a:srgbClr val="0F172A"/>
-                </a:solidFill>
-              </a:defRPr>
-            </a:pPr>
-            <a:r>
-              <a:t>Stage 4: Automated Closed-Loop (Weeks 17+)</a:t>
-            </a:r>
-          </a:p>
-          <a:p>
-            <a:pPr>
-              <a:spcAft>
-                <a:spcPts val="400"/>
-              </a:spcAft>
-              <a:defRPr sz="1100">
-                <a:solidFill>
-                  <a:srgbClr val="1E293B"/>
-                </a:solidFill>
-              </a:defRPr>
-            </a:pPr>
-            <a:r>
-              <a:t>• Direct API integration with MR.DIY Warehouse Management System (WMS).</a:t>
-            </a:r>
-          </a:p>
-          <a:p>
-            <a:pPr>
-              <a:spcAft>
-                <a:spcPts val="400"/>
-              </a:spcAft>
-              <a:defRPr sz="1100">
-                <a:solidFill>
-                  <a:srgbClr val="1E293B"/>
-                </a:solidFill>
-              </a:defRPr>
-            </a:pPr>
-            <a:r>
-              <a:t>• Automated drift detection: retrain DFL when regret exceeds 1.5x threshold.</a:t>
-            </a:r>
-          </a:p>
-          <a:p>
-            <a:pPr>
-              <a:spcAft>
-                <a:spcPts val="400"/>
-              </a:spcAft>
-              <a:defRPr sz="1100">
-                <a:solidFill>
-                  <a:srgbClr val="1E293B"/>
-                </a:solidFill>
-              </a:defRPr>
-            </a:pPr>
-            <a:r>
-              <a:t>• Projected annual inventory cost savings: 12%–18% across pilot categories.</a:t>
+              <a:t>Synthetic MU economics | Corrected v2 experiments | 6/7</a:t>
             </a:r>
           </a:p>
         </p:txBody>
@@ -7390,8 +6647,8 @@
         </p:nvSpPr>
         <p:spPr>
           <a:xfrm>
-            <a:off x="731520" y="457200"/>
-            <a:ext cx="7315200" cy="274320"/>
+            <a:off x="594360" y="365760"/>
+            <a:ext cx="10972800" cy="274320"/>
           </a:xfrm>
           <a:prstGeom prst="rect">
             <a:avLst/>
@@ -7405,14 +6662,18 @@
           <a:lstStyle/>
           <a:p>
             <a:pPr>
-              <a:defRPr sz="1000" b="1">
-                <a:solidFill>
-                  <a:srgbClr val="D97706"/>
-                </a:solidFill>
+              <a:spcAft>
+                <a:spcPts val="800"/>
+              </a:spcAft>
+              <a:defRPr sz="1100" b="1">
+                <a:solidFill>
+                  <a:srgbClr val="0369A1"/>
+                </a:solidFill>
+                <a:latin typeface="Arial"/>
               </a:defRPr>
             </a:pPr>
             <a:r>
-              <a:t>MR.DIY DECISION INTELLIGENCE</a:t>
+              <a:t>DECISION INTELLIGENCE / INTERVIEW RESEARCH PROTOTYPE</a:t>
             </a:r>
           </a:p>
         </p:txBody>
@@ -7425,8 +6686,8 @@
         </p:nvSpPr>
         <p:spPr>
           <a:xfrm>
-            <a:off x="731520" y="731520"/>
-            <a:ext cx="10515600" cy="548640"/>
+            <a:off x="594360" y="822960"/>
+            <a:ext cx="10972800" cy="594360"/>
           </a:xfrm>
           <a:prstGeom prst="rect">
             <a:avLst/>
@@ -7440,14 +6701,18 @@
           <a:lstStyle/>
           <a:p>
             <a:pPr>
-              <a:defRPr sz="2200" b="1">
+              <a:spcAft>
+                <a:spcPts val="800"/>
+              </a:spcAft>
+              <a:defRPr sz="2800" b="1">
                 <a:solidFill>
                   <a:srgbClr val="0F172A"/>
                 </a:solidFill>
+                <a:latin typeface="Arial"/>
               </a:defRPr>
             </a:pPr>
             <a:r>
-              <a:t>Technical Appendix: Mathematical Formulations &amp; Solvers</a:t>
+              <a:t>Recommendation: validate before an operational pilot</a:t>
             </a:r>
           </a:p>
         </p:txBody>
@@ -7460,8 +6725,8 @@
         </p:nvSpPr>
         <p:spPr>
           <a:xfrm>
-            <a:off x="731520" y="1280160"/>
-            <a:ext cx="10515600" cy="365760"/>
+            <a:off x="594360" y="1508760"/>
+            <a:ext cx="10972800" cy="457200"/>
           </a:xfrm>
           <a:prstGeom prst="rect">
             <a:avLst/>
@@ -7475,73 +6740,32 @@
           <a:lstStyle/>
           <a:p>
             <a:pPr>
-              <a:defRPr sz="1200">
-                <a:solidFill>
-                  <a:srgbClr val="64748B"/>
-                </a:solidFill>
+              <a:spcAft>
+                <a:spcPts val="800"/>
+              </a:spcAft>
+              <a:defRPr sz="1500" b="0">
+                <a:solidFill>
+                  <a:srgbClr val="475569"/>
+                </a:solidFill>
+                <a:latin typeface="Arial"/>
               </a:defRPr>
             </a:pPr>
             <a:r>
-              <a:t>Exact optimization models, loss formulations, and computational complexity guarantees.</a:t>
-            </a:r>
-          </a:p>
-        </p:txBody>
-      </p:sp>
-      <p:sp>
-        <p:nvSpPr>
-          <p:cNvPr id="5" name="Rounded Rectangle 4"/>
-          <p:cNvSpPr/>
+              <a:t>A defensible result includes its limitations</a:t>
+            </a:r>
+          </a:p>
+        </p:txBody>
+      </p:sp>
+      <p:sp>
+        <p:nvSpPr>
+          <p:cNvPr id="5" name="TextBox 4"/>
+          <p:cNvSpPr txBox="1"/>
           <p:nvPr/>
         </p:nvSpPr>
         <p:spPr>
           <a:xfrm>
-            <a:off x="731520" y="1828800"/>
-            <a:ext cx="5120640" cy="4389120"/>
-          </a:xfrm>
-          <a:prstGeom prst="roundRect">
-            <a:avLst/>
-          </a:prstGeom>
-          <a:solidFill>
-            <a:srgbClr val="F8FAFC"/>
-          </a:solidFill>
-          <a:ln w="19050">
-            <a:solidFill>
-              <a:srgbClr val="E2E8F0"/>
-            </a:solidFill>
-          </a:ln>
-        </p:spPr>
-        <p:style>
-          <a:lnRef idx="1">
-            <a:schemeClr val="accent1"/>
-          </a:lnRef>
-          <a:fillRef idx="3">
-            <a:schemeClr val="accent1"/>
-          </a:fillRef>
-          <a:effectRef idx="2">
-            <a:schemeClr val="accent1"/>
-          </a:effectRef>
-          <a:fontRef idx="minor">
-            <a:schemeClr val="lt1"/>
-          </a:fontRef>
-        </p:style>
-        <p:txBody>
-          <a:bodyPr rtlCol="0" anchor="ctr"/>
-          <a:lstStyle/>
-          <a:p>
-            <a:pPr algn="ctr"/>
-          </a:p>
-        </p:txBody>
-      </p:sp>
-      <p:sp>
-        <p:nvSpPr>
-          <p:cNvPr id="6" name="TextBox 5"/>
-          <p:cNvSpPr txBox="1"/>
-          <p:nvPr/>
-        </p:nvSpPr>
-        <p:spPr>
-          <a:xfrm>
-            <a:off x="914400" y="1965960"/>
-            <a:ext cx="4754880" cy="4114800"/>
+            <a:off x="685800" y="2148840"/>
+            <a:ext cx="10835640" cy="4206240"/>
           </a:xfrm>
           <a:prstGeom prst="rect">
             <a:avLst/>
@@ -7558,178 +6782,93 @@
               <a:spcAft>
                 <a:spcPts val="800"/>
               </a:spcAft>
-              <a:defRPr sz="1400" b="1">
-                <a:solidFill>
-                  <a:srgbClr val="0F172A"/>
-                </a:solidFill>
+              <a:defRPr sz="1900" b="0">
+                <a:solidFill>
+                  <a:srgbClr val="1E293B"/>
+                </a:solidFill>
+                <a:latin typeface="Arial"/>
               </a:defRPr>
             </a:pPr>
             <a:r>
-              <a:t>Mathematical Formulations</a:t>
+              <a:t>• Choose policy using the business objective and validation evidence; do not assume the most complex model wins.</a:t>
             </a:r>
           </a:p>
           <a:p>
             <a:pPr>
               <a:spcAft>
-                <a:spcPts val="400"/>
+                <a:spcPts val="800"/>
               </a:spcAft>
-              <a:defRPr sz="1100">
+              <a:defRPr sz="1900" b="0">
                 <a:solidFill>
                   <a:srgbClr val="1E293B"/>
                 </a:solidFill>
+                <a:latin typeface="Arial"/>
               </a:defRPr>
             </a:pPr>
             <a:r>
-              <a:t>• Decision Objective: min_x sum_{s,p} [ b_sp * (D - I - x)+ + h_sp * (I + x - D)+ + t_sp * x_sp ].</a:t>
+              <a:t>• Limitations: sales censoring, synthetic economics, small selected cohorts, short test horizon and domain shift.</a:t>
             </a:r>
           </a:p>
           <a:p>
             <a:pPr>
               <a:spcAft>
-                <a:spcPts val="400"/>
+                <a:spcPts val="800"/>
               </a:spcAft>
-              <a:defRPr sz="1100">
+              <a:defRPr sz="1900" b="0">
                 <a:solidFill>
                   <a:srgbClr val="1E293B"/>
                 </a:solidFill>
+                <a:latin typeface="Arial"/>
               </a:defRPr>
             </a:pPr>
             <a:r>
-              <a:t>• Linear Marginal Identity: C(x,d) = C(0,d) + sum_{s,k} c_true[s,k; d] * y[s,k].</a:t>
+              <a:t>• Retrospective reruns do not create a fresh confirmatory holdout. Future evidence should include untouched periods.</a:t>
             </a:r>
           </a:p>
           <a:p>
             <a:pPr>
               <a:spcAft>
-                <a:spcPts val="400"/>
+                <a:spcPts val="800"/>
               </a:spcAft>
-              <a:defRPr sz="1100">
+              <a:defRPr sz="1900" b="0">
                 <a:solidFill>
                   <a:srgbClr val="1E293B"/>
                 </a:solidFill>
+                <a:latin typeface="Arial"/>
               </a:defRPr>
             </a:pPr>
             <a:r>
-              <a:t>• Where c_true = t - b if d &gt;= I + k, else t + h.</a:t>
+              <a:t>• Next: obtain real stock and lead-time records, validate costs and case packs, then run a monitored planner-in-the-loop pilot.</a:t>
             </a:r>
           </a:p>
           <a:p>
             <a:pPr>
               <a:spcAft>
-                <a:spcPts val="400"/>
+                <a:spcPts val="800"/>
               </a:spcAft>
-              <a:defRPr sz="1100">
+              <a:defRPr sz="1900" b="0">
                 <a:solidFill>
                   <a:srgbClr val="1E293B"/>
                 </a:solidFill>
+                <a:latin typeface="Arial"/>
               </a:defRPr>
             </a:pPr>
             <a:r>
-              <a:t>• SPO+ Surrogate: L_SPO+(c_hat, c_true) = max_w {(c_true - 2 c_hat)^T w} + 2 c_hat^T w* - c_true^T w*.</a:t>
-            </a:r>
-          </a:p>
-          <a:p>
-            <a:pPr>
-              <a:spcAft>
-                <a:spcPts val="400"/>
-              </a:spcAft>
-              <a:defRPr sz="1100">
-                <a:solidFill>
-                  <a:srgbClr val="1E293B"/>
-                </a:solidFill>
-              </a:defRPr>
-            </a:pPr>
-            <a:r>
-              <a:t>• Probability Reweighting: P_alpha = {w: sum w = 1, 0 &lt;= w_j &lt;= p_j/(1-alpha)}.</a:t>
-            </a:r>
-          </a:p>
-          <a:p>
-            <a:pPr>
-              <a:spcAft>
-                <a:spcPts val="400"/>
-              </a:spcAft>
-              <a:defRPr sz="1100">
-                <a:solidFill>
-                  <a:srgbClr val="1E293B"/>
-                </a:solidFill>
-              </a:defRPr>
-            </a:pPr>
-            <a:r>
-              <a:t>• DRO Equivalence: max_{w in P_alpha} sum w_j L_j(x) = eta + (1/(1-alpha)) * sum p_j [L_j - eta]+ = CVaR_alpha.</a:t>
-            </a:r>
-          </a:p>
-          <a:p>
-            <a:pPr>
-              <a:spcAft>
-                <a:spcPts val="400"/>
-              </a:spcAft>
-              <a:defRPr sz="1100">
-                <a:solidFill>
-                  <a:srgbClr val="1E293B"/>
-                </a:solidFill>
-              </a:defRPr>
-            </a:pPr>
-            <a:r>
-              <a:t>• Service-Level MILP: sum_{j,s,p} p_j u_{j,s,p} - slack * D_tot &lt;= (1 - beta*) * D_tot.</a:t>
-            </a:r>
-          </a:p>
-        </p:txBody>
-      </p:sp>
-      <p:sp>
-        <p:nvSpPr>
-          <p:cNvPr id="7" name="Rounded Rectangle 6"/>
-          <p:cNvSpPr/>
+              <a:t>• Demonstrated: a tested research workflow and offline prototype. Enterprise-wide scale and actual savings remain to be established.</a:t>
+            </a:r>
+          </a:p>
+        </p:txBody>
+      </p:sp>
+      <p:sp>
+        <p:nvSpPr>
+          <p:cNvPr id="6" name="TextBox 5"/>
+          <p:cNvSpPr txBox="1"/>
           <p:nvPr/>
         </p:nvSpPr>
         <p:spPr>
           <a:xfrm>
-            <a:off x="6217920" y="1828800"/>
-            <a:ext cx="5212080" cy="4389120"/>
-          </a:xfrm>
-          <a:prstGeom prst="roundRect">
-            <a:avLst/>
-          </a:prstGeom>
-          <a:solidFill>
-            <a:srgbClr val="F8FAFC"/>
-          </a:solidFill>
-          <a:ln w="19050">
-            <a:solidFill>
-              <a:srgbClr val="E2E8F0"/>
-            </a:solidFill>
-          </a:ln>
-        </p:spPr>
-        <p:style>
-          <a:lnRef idx="1">
-            <a:schemeClr val="accent1"/>
-          </a:lnRef>
-          <a:fillRef idx="3">
-            <a:schemeClr val="accent1"/>
-          </a:fillRef>
-          <a:effectRef idx="2">
-            <a:schemeClr val="accent1"/>
-          </a:effectRef>
-          <a:fontRef idx="minor">
-            <a:schemeClr val="lt1"/>
-          </a:fontRef>
-        </p:style>
-        <p:txBody>
-          <a:bodyPr rtlCol="0" anchor="ctr"/>
-          <a:lstStyle/>
-          <a:p>
-            <a:pPr algn="ctr"/>
-          </a:p>
-        </p:txBody>
-      </p:sp>
-      <p:sp>
-        <p:nvSpPr>
-          <p:cNvPr id="8" name="TextBox 7"/>
-          <p:cNvSpPr txBox="1"/>
-          <p:nvPr/>
-        </p:nvSpPr>
-        <p:spPr>
-          <a:xfrm>
-            <a:off x="6400800" y="1965960"/>
-            <a:ext cx="4846320" cy="4114800"/>
+            <a:off x="594360" y="6428232"/>
+            <a:ext cx="10972800" cy="228600"/>
           </a:xfrm>
           <a:prstGeom prst="rect">
             <a:avLst/>
@@ -7746,104 +6885,15 @@
               <a:spcAft>
                 <a:spcPts val="800"/>
               </a:spcAft>
-              <a:defRPr sz="1400" b="1">
-                <a:solidFill>
-                  <a:srgbClr val="0284C7"/>
-                </a:solidFill>
+              <a:defRPr sz="1000" b="0">
+                <a:solidFill>
+                  <a:srgbClr val="64748B"/>
+                </a:solidFill>
+                <a:latin typeface="Arial"/>
               </a:defRPr>
             </a:pPr>
             <a:r>
-              <a:t>Computational &amp; Engineering Specs</a:t>
-            </a:r>
-          </a:p>
-          <a:p>
-            <a:pPr>
-              <a:spcAft>
-                <a:spcPts val="400"/>
-              </a:spcAft>
-              <a:defRPr sz="1100">
-                <a:solidFill>
-                  <a:srgbClr val="1E293B"/>
-                </a:solidFill>
-              </a:defRPr>
-            </a:pPr>
-            <a:r>
-              <a:t>• Primary Backend: Python 3.12, PyTorch 2.5, PyEPO 0.3.7, scipy.optimize.milp, HiGHS (highspy).</a:t>
-            </a:r>
-          </a:p>
-          <a:p>
-            <a:pPr>
-              <a:spcAft>
-                <a:spcPts val="400"/>
-              </a:spcAft>
-              <a:defRPr sz="1100">
-                <a:solidFill>
-                  <a:srgbClr val="1E293B"/>
-                </a:solidFill>
-              </a:defRPr>
-            </a:pPr>
-            <a:r>
-              <a:t>• Solver Characteristics: 100% open-source, CPU-first, zero commercial license dependencies.</a:t>
-            </a:r>
-          </a:p>
-          <a:p>
-            <a:pPr>
-              <a:spcAft>
-                <a:spcPts val="400"/>
-              </a:spcAft>
-              <a:defRPr sz="1100">
-                <a:solidFill>
-                  <a:srgbClr val="1E293B"/>
-                </a:solidFill>
-              </a:defRPr>
-            </a:pPr>
-            <a:r>
-              <a:t>• Solve Latency: Nominal LP: &lt;8ms | Scenario DRO MILP (50 scenarios): &lt;38ms | Service-Level MILP: &lt;42ms.</a:t>
-            </a:r>
-          </a:p>
-          <a:p>
-            <a:pPr>
-              <a:spcAft>
-                <a:spcPts val="400"/>
-              </a:spcAft>
-              <a:defRPr sz="1100">
-                <a:solidFill>
-                  <a:srgbClr val="1E293B"/>
-                </a:solidFill>
-              </a:defRPr>
-            </a:pPr>
-            <a:r>
-              <a:t>• Memory Footprint: Lightweight sparse CSR matrices (&lt;15MB RAM per solve instance).</a:t>
-            </a:r>
-          </a:p>
-          <a:p>
-            <a:pPr>
-              <a:spcAft>
-                <a:spcPts val="400"/>
-              </a:spcAft>
-              <a:defRPr sz="1100">
-                <a:solidFill>
-                  <a:srgbClr val="1E293B"/>
-                </a:solidFill>
-              </a:defRPr>
-            </a:pPr>
-            <a:r>
-              <a:t>• Testing &amp; Verification: 22 unit &amp; integration tests covering nonanticipativity, mass conservation, toy oracle optimality, and SPO+ subgradients.</a:t>
-            </a:r>
-          </a:p>
-          <a:p>
-            <a:pPr>
-              <a:spcAft>
-                <a:spcPts val="400"/>
-              </a:spcAft>
-              <a:defRPr sz="1100">
-                <a:solidFill>
-                  <a:srgbClr val="1E293B"/>
-                </a:solidFill>
-              </a:defRPr>
-            </a:pPr>
-            <a:r>
-              <a:t>• Dashboard Architecture: Offline Streamlit multi-page application with precomputed parquet bundles and live MILP re-solvers.</a:t>
+              <a:t>Synthetic MU economics | Corrected v2 experiments | 7/7</a:t>
             </a:r>
           </a:p>
         </p:txBody>
